--- a/textual data analysis/docs/判決文本會說話嗎_崇越決賽簡報.pptx
+++ b/textual data analysis/docs/判決文本會說話嗎_崇越決賽簡報.pptx
@@ -226,7 +226,7 @@
               </c14:invertSolidFillFmt>
             </c:ext>
             <c:ext xmlns:c16="http://schemas.microsoft.com/office/drawing/2014/chart" uri="{C3380CC4-5D6E-409C-BE32-E72D297353CC}">
-              <c16:uniqueId val="{00000000-F61B-C142-B571-EB11A9A06831}"/>
+              <c16:uniqueId val="{00000000-EC99-0B46-A83D-E661C9518470}"/>
             </c:ext>
           </c:extLst>
         </c:ser>
@@ -1759,60 +1759,10 @@
       </p:grpSpPr>
       <p:sp>
         <p:nvSpPr>
-          <p:cNvPr id="13" name="Rectangle 12">
-            <a:extLst>
-              <a:ext uri="{FF2B5EF4-FFF2-40B4-BE49-F238E27FC236}">
-                <a16:creationId xmlns:a16="http://schemas.microsoft.com/office/drawing/2014/main" id="{B61B9429-5D29-41A2-BD29-D4AE7E670714}"/>
-              </a:ext>
-            </a:extLst>
-          </p:cNvPr>
-          <p:cNvSpPr>
-            <a:spLocks noGrp="1"/>
-          </p:cNvSpPr>
-          <p:nvPr/>
-        </p:nvSpPr>
-        <p:spPr>
-          <a:xfrm>
-            <a:off x="685800" y="457200"/>
-            <a:ext cx="3333750" cy="228600"/>
-          </a:xfrm>
-          <a:prstGeom prst="rect">
-            <a:avLst/>
-          </a:prstGeom>
-          <a:noFill/>
-          <a:ln w="0">
-            <a:noFill/>
-            <a:prstDash val="solid"/>
-          </a:ln>
-        </p:spPr>
-        <p:txBody>
-          <a:bodyPr anchor="ctr"/>
-          <a:lstStyle/>
-          <a:p>
-            <a:pPr>
-              <a:defRPr sz="1050" b="1">
-                <a:solidFill>
-                  <a:srgbClr val="3D8DFF"/>
-                </a:solidFill>
-              </a:defRPr>
-            </a:pPr>
-            <a:r>
-              <a:rPr sz="1050" b="1">
-                <a:solidFill>
-                  <a:srgbClr val="3D8DFF"/>
-                </a:solidFill>
-              </a:rPr>
-              <a:t>崇越論文大賞決賽｜M0263</a:t>
-            </a:r>
-          </a:p>
-        </p:txBody>
-      </p:sp>
-      <p:sp>
-        <p:nvSpPr>
-          <p:cNvPr id="2" name="cover-title">
-            <a:extLst>
-              <a:ext uri="{FF2B5EF4-FFF2-40B4-BE49-F238E27FC236}">
-                <a16:creationId xmlns:a16="http://schemas.microsoft.com/office/drawing/2014/main" id="{99B3B921-7524-4476-A8FA-FA778BAA0D2B}"/>
+          <p:cNvPr id="11" name="cover-title">
+            <a:extLst>
+              <a:ext uri="{FF2B5EF4-FFF2-40B4-BE49-F238E27FC236}">
+                <a16:creationId xmlns:a16="http://schemas.microsoft.com/office/drawing/2014/main" id="{F649DE07-C0CA-425F-B89E-1C4E72382302}"/>
               </a:ext>
             </a:extLst>
           </p:cNvPr>
@@ -1847,18 +1797,13 @@
               </a:defRPr>
             </a:pPr>
             <a:r>
-              <a:rPr sz="4800" b="1" dirty="0" err="1">
+              <a:rPr sz="4800" b="1">
                 <a:solidFill>
                   <a:srgbClr val="111827"/>
                 </a:solidFill>
               </a:rPr>
               <a:t>判決文本</a:t>
             </a:r>
-            <a:endParaRPr sz="4800" b="1" dirty="0">
-              <a:solidFill>
-                <a:srgbClr val="111827"/>
-              </a:solidFill>
-            </a:endParaRPr>
           </a:p>
           <a:p>
             <a:pPr>
@@ -1869,30 +1814,22 @@
               </a:defRPr>
             </a:pPr>
             <a:r>
-              <a:rPr sz="4800" b="1" dirty="0" err="1">
-                <a:solidFill>
-                  <a:srgbClr val="111827"/>
-                </a:solidFill>
-              </a:rPr>
-              <a:t>會說話嗎</a:t>
-            </a:r>
-            <a:r>
-              <a:rPr sz="4800" b="1" dirty="0">
-                <a:solidFill>
-                  <a:srgbClr val="111827"/>
-                </a:solidFill>
-              </a:rPr>
-              <a:t>？</a:t>
-            </a:r>
-          </a:p>
-        </p:txBody>
-      </p:sp>
-      <p:sp>
-        <p:nvSpPr>
-          <p:cNvPr id="3" name="Rectangle 2">
-            <a:extLst>
-              <a:ext uri="{FF2B5EF4-FFF2-40B4-BE49-F238E27FC236}">
-                <a16:creationId xmlns:a16="http://schemas.microsoft.com/office/drawing/2014/main" id="{D45262E8-05AB-4C7E-AD2C-83A3155A2B46}"/>
+              <a:rPr sz="4800" b="1">
+                <a:solidFill>
+                  <a:srgbClr val="111827"/>
+                </a:solidFill>
+              </a:rPr>
+              <a:t>會說話嗎？</a:t>
+            </a:r>
+          </a:p>
+        </p:txBody>
+      </p:sp>
+      <p:sp>
+        <p:nvSpPr>
+          <p:cNvPr id="2" name="Rectangle 1">
+            <a:extLst>
+              <a:ext uri="{FF2B5EF4-FFF2-40B4-BE49-F238E27FC236}">
+                <a16:creationId xmlns:a16="http://schemas.microsoft.com/office/drawing/2014/main" id="{808571D6-393B-42C2-BCDF-ED594D955900}"/>
               </a:ext>
             </a:extLst>
           </p:cNvPr>
@@ -1939,10 +1876,10 @@
       </p:sp>
       <p:sp>
         <p:nvSpPr>
-          <p:cNvPr id="4" name="Rectangle 3">
-            <a:extLst>
-              <a:ext uri="{FF2B5EF4-FFF2-40B4-BE49-F238E27FC236}">
-                <a16:creationId xmlns:a16="http://schemas.microsoft.com/office/drawing/2014/main" id="{8008BB6A-2107-4EC4-B33C-022F509E817C}"/>
+          <p:cNvPr id="3" name="Rectangle 2">
+            <a:extLst>
+              <a:ext uri="{FF2B5EF4-FFF2-40B4-BE49-F238E27FC236}">
+                <a16:creationId xmlns:a16="http://schemas.microsoft.com/office/drawing/2014/main" id="{F2EB1886-A954-4649-A9BD-6043692AA6A7}"/>
               </a:ext>
             </a:extLst>
           </p:cNvPr>
@@ -1977,10 +1914,10 @@
       </p:sp>
       <p:sp>
         <p:nvSpPr>
-          <p:cNvPr id="5" name="Rectangle 4">
-            <a:extLst>
-              <a:ext uri="{FF2B5EF4-FFF2-40B4-BE49-F238E27FC236}">
-                <a16:creationId xmlns:a16="http://schemas.microsoft.com/office/drawing/2014/main" id="{E554FE0B-F110-4907-A466-36E6D5A8385D}"/>
+          <p:cNvPr id="4" name="Rectangle 3">
+            <a:extLst>
+              <a:ext uri="{FF2B5EF4-FFF2-40B4-BE49-F238E27FC236}">
+                <a16:creationId xmlns:a16="http://schemas.microsoft.com/office/drawing/2014/main" id="{12DEDA79-A670-48F9-A623-5F69A54EFD15}"/>
               </a:ext>
             </a:extLst>
           </p:cNvPr>
@@ -2015,10 +1952,10 @@
       </p:sp>
       <p:sp>
         <p:nvSpPr>
-          <p:cNvPr id="6" name="Rectangle 5">
-            <a:extLst>
-              <a:ext uri="{FF2B5EF4-FFF2-40B4-BE49-F238E27FC236}">
-                <a16:creationId xmlns:a16="http://schemas.microsoft.com/office/drawing/2014/main" id="{1B2CEDE2-150F-4B5A-B544-48A733027E87}"/>
+          <p:cNvPr id="5" name="Rectangle 4">
+            <a:extLst>
+              <a:ext uri="{FF2B5EF4-FFF2-40B4-BE49-F238E27FC236}">
+                <a16:creationId xmlns:a16="http://schemas.microsoft.com/office/drawing/2014/main" id="{CAF62904-9AF1-401B-8DDF-4528083576BF}"/>
               </a:ext>
             </a:extLst>
           </p:cNvPr>
@@ -2065,10 +2002,10 @@
       </p:sp>
       <p:sp>
         <p:nvSpPr>
-          <p:cNvPr id="7" name="Rectangle 6">
-            <a:extLst>
-              <a:ext uri="{FF2B5EF4-FFF2-40B4-BE49-F238E27FC236}">
-                <a16:creationId xmlns:a16="http://schemas.microsoft.com/office/drawing/2014/main" id="{CEB64FAF-9507-4F29-AF80-575510E76D39}"/>
+          <p:cNvPr id="6" name="Rectangle 5">
+            <a:extLst>
+              <a:ext uri="{FF2B5EF4-FFF2-40B4-BE49-F238E27FC236}">
+                <a16:creationId xmlns:a16="http://schemas.microsoft.com/office/drawing/2014/main" id="{CC3F3225-3F4B-4666-B4C9-9E406B149CEF}"/>
               </a:ext>
             </a:extLst>
           </p:cNvPr>
@@ -2115,10 +2052,10 @@
       </p:sp>
       <p:sp>
         <p:nvSpPr>
-          <p:cNvPr id="8" name="Rectangle 7">
-            <a:extLst>
-              <a:ext uri="{FF2B5EF4-FFF2-40B4-BE49-F238E27FC236}">
-                <a16:creationId xmlns:a16="http://schemas.microsoft.com/office/drawing/2014/main" id="{E90DD8B6-68BA-426E-AA0F-626040654DCC}"/>
+          <p:cNvPr id="7" name="Rectangle 6">
+            <a:extLst>
+              <a:ext uri="{FF2B5EF4-FFF2-40B4-BE49-F238E27FC236}">
+                <a16:creationId xmlns:a16="http://schemas.microsoft.com/office/drawing/2014/main" id="{D3AD8C5E-85AC-4882-859A-210A34429A4F}"/>
               </a:ext>
             </a:extLst>
           </p:cNvPr>
@@ -2153,10 +2090,10 @@
       </p:sp>
       <p:sp>
         <p:nvSpPr>
-          <p:cNvPr id="9" name="Rectangle 8">
-            <a:extLst>
-              <a:ext uri="{FF2B5EF4-FFF2-40B4-BE49-F238E27FC236}">
-                <a16:creationId xmlns:a16="http://schemas.microsoft.com/office/drawing/2014/main" id="{CADB7CBD-B70E-4316-B0F4-8B9FEFC58D62}"/>
+          <p:cNvPr id="8" name="Rectangle 7">
+            <a:extLst>
+              <a:ext uri="{FF2B5EF4-FFF2-40B4-BE49-F238E27FC236}">
+                <a16:creationId xmlns:a16="http://schemas.microsoft.com/office/drawing/2014/main" id="{261E5324-A213-4462-BBA4-94AD2AB46C2B}"/>
               </a:ext>
             </a:extLst>
           </p:cNvPr>
@@ -2220,10 +2157,10 @@
       </p:sp>
       <p:sp>
         <p:nvSpPr>
-          <p:cNvPr id="10" name="Rectangle 9">
-            <a:extLst>
-              <a:ext uri="{FF2B5EF4-FFF2-40B4-BE49-F238E27FC236}">
-                <a16:creationId xmlns:a16="http://schemas.microsoft.com/office/drawing/2014/main" id="{AFD9596E-D990-4D13-84B7-814047F63502}"/>
+          <p:cNvPr id="9" name="Rectangle 8">
+            <a:extLst>
+              <a:ext uri="{FF2B5EF4-FFF2-40B4-BE49-F238E27FC236}">
+                <a16:creationId xmlns:a16="http://schemas.microsoft.com/office/drawing/2014/main" id="{D5FD2FE8-3C39-4761-95FD-C51FAA7E0AD3}"/>
               </a:ext>
             </a:extLst>
           </p:cNvPr>
@@ -2287,60 +2224,10 @@
       </p:sp>
       <p:sp>
         <p:nvSpPr>
-          <p:cNvPr id="11" name="Rectangle 10">
-            <a:extLst>
-              <a:ext uri="{FF2B5EF4-FFF2-40B4-BE49-F238E27FC236}">
-                <a16:creationId xmlns:a16="http://schemas.microsoft.com/office/drawing/2014/main" id="{4EA6117E-7A31-413A-8649-A911E29E17C4}"/>
-              </a:ext>
-            </a:extLst>
-          </p:cNvPr>
-          <p:cNvSpPr>
-            <a:spLocks noGrp="1"/>
-          </p:cNvSpPr>
-          <p:nvPr/>
-        </p:nvSpPr>
-        <p:spPr>
-          <a:xfrm>
-            <a:off x="685800" y="6457950"/>
-            <a:ext cx="3333750" cy="152400"/>
-          </a:xfrm>
-          <a:prstGeom prst="rect">
-            <a:avLst/>
-          </a:prstGeom>
-          <a:noFill/>
-          <a:ln w="0">
-            <a:noFill/>
-            <a:prstDash val="solid"/>
-          </a:ln>
-        </p:spPr>
-        <p:txBody>
-          <a:bodyPr anchor="ctr"/>
-          <a:lstStyle/>
-          <a:p>
-            <a:pPr>
-              <a:defRPr sz="825" b="0">
-                <a:solidFill>
-                  <a:srgbClr val="5D6775"/>
-                </a:solidFill>
-              </a:defRPr>
-            </a:pPr>
-            <a:r>
-              <a:rPr sz="825" b="0">
-                <a:solidFill>
-                  <a:srgbClr val="5D6775"/>
-                </a:solidFill>
-              </a:rPr>
-              <a:t>崇越論文大賞決賽  |  M0263</a:t>
-            </a:r>
-          </a:p>
-        </p:txBody>
-      </p:sp>
-      <p:sp>
-        <p:nvSpPr>
-          <p:cNvPr id="12" name="Rectangle 11">
-            <a:extLst>
-              <a:ext uri="{FF2B5EF4-FFF2-40B4-BE49-F238E27FC236}">
-                <a16:creationId xmlns:a16="http://schemas.microsoft.com/office/drawing/2014/main" id="{849E426E-C307-40BD-847E-52CBC0110FA3}"/>
+          <p:cNvPr id="10" name="Rectangle 9">
+            <a:extLst>
+              <a:ext uri="{FF2B5EF4-FFF2-40B4-BE49-F238E27FC236}">
+                <a16:creationId xmlns:a16="http://schemas.microsoft.com/office/drawing/2014/main" id="{BABBF5B4-CEFA-419C-821D-4FC4EF441E27}"/>
               </a:ext>
             </a:extLst>
           </p:cNvPr>
@@ -2388,7 +2275,7 @@
     </p:spTree>
     <p:extLst>
       <p:ext uri="{BB962C8B-B14F-4D97-AF65-F5344CB8AC3E}">
-        <p14:creationId xmlns:p14="http://schemas.microsoft.com/office/powerpoint/2010/main" val="711669933"/>
+        <p14:creationId xmlns:p14="http://schemas.microsoft.com/office/powerpoint/2010/main" val="1259811334"/>
       </p:ext>
     </p:extLst>
   </p:cSld>
@@ -2425,10 +2312,10 @@
       </p:grpSpPr>
       <p:sp>
         <p:nvSpPr>
-          <p:cNvPr id="19" name="Rectangle 18">
-            <a:extLst>
-              <a:ext uri="{FF2B5EF4-FFF2-40B4-BE49-F238E27FC236}">
-                <a16:creationId xmlns:a16="http://schemas.microsoft.com/office/drawing/2014/main" id="{4244B149-F4BC-4DE1-9A08-14009814CFB3}"/>
+          <p:cNvPr id="18" name="Rectangle 17">
+            <a:extLst>
+              <a:ext uri="{FF2B5EF4-FFF2-40B4-BE49-F238E27FC236}">
+                <a16:creationId xmlns:a16="http://schemas.microsoft.com/office/drawing/2014/main" id="{29427281-3B13-49B9-9621-805129EF2E11}"/>
               </a:ext>
             </a:extLst>
           </p:cNvPr>
@@ -2478,7 +2365,7 @@
           <p:cNvPr id="2" name="title">
             <a:extLst>
               <a:ext uri="{FF2B5EF4-FFF2-40B4-BE49-F238E27FC236}">
-                <a16:creationId xmlns:a16="http://schemas.microsoft.com/office/drawing/2014/main" id="{118DEFBB-785E-4528-9B1E-2B8597FFEBCD}"/>
+                <a16:creationId xmlns:a16="http://schemas.microsoft.com/office/drawing/2014/main" id="{1CB770FE-E6EC-4BDC-A115-41E984843DF5}"/>
               </a:ext>
             </a:extLst>
           </p:cNvPr>
@@ -2528,7 +2415,7 @@
           <p:cNvPr id="3" name="Rectangle 2">
             <a:extLst>
               <a:ext uri="{FF2B5EF4-FFF2-40B4-BE49-F238E27FC236}">
-                <a16:creationId xmlns:a16="http://schemas.microsoft.com/office/drawing/2014/main" id="{478348AB-46A5-43B2-BBDB-26766A482E73}"/>
+                <a16:creationId xmlns:a16="http://schemas.microsoft.com/office/drawing/2014/main" id="{5A7DD7C6-94B4-4539-962F-9B17F545DD46}"/>
               </a:ext>
             </a:extLst>
           </p:cNvPr>
@@ -2578,7 +2465,7 @@
           <p:cNvPr id="4" name="Rectangle 3">
             <a:extLst>
               <a:ext uri="{FF2B5EF4-FFF2-40B4-BE49-F238E27FC236}">
-                <a16:creationId xmlns:a16="http://schemas.microsoft.com/office/drawing/2014/main" id="{88A06CBD-228C-4A64-9A40-A5CA18A99543}"/>
+                <a16:creationId xmlns:a16="http://schemas.microsoft.com/office/drawing/2014/main" id="{C4054108-1EE4-4BEB-BEF7-DB3B0A929A45}"/>
               </a:ext>
             </a:extLst>
           </p:cNvPr>
@@ -2616,7 +2503,7 @@
           <p:cNvPr id="5" name="Rectangle 4">
             <a:extLst>
               <a:ext uri="{FF2B5EF4-FFF2-40B4-BE49-F238E27FC236}">
-                <a16:creationId xmlns:a16="http://schemas.microsoft.com/office/drawing/2014/main" id="{4213AE0F-359F-4E01-9EAE-14411A6218E1}"/>
+                <a16:creationId xmlns:a16="http://schemas.microsoft.com/office/drawing/2014/main" id="{DC7FA610-62E3-4E70-B8CD-333E6BCB9482}"/>
               </a:ext>
             </a:extLst>
           </p:cNvPr>
@@ -2683,7 +2570,7 @@
           <p:cNvPr id="6" name="Rectangle 5">
             <a:extLst>
               <a:ext uri="{FF2B5EF4-FFF2-40B4-BE49-F238E27FC236}">
-                <a16:creationId xmlns:a16="http://schemas.microsoft.com/office/drawing/2014/main" id="{16C1C92A-9D8D-4D5E-BE58-9B9D60DF0581}"/>
+                <a16:creationId xmlns:a16="http://schemas.microsoft.com/office/drawing/2014/main" id="{C370D054-5F68-409F-B39B-FD251C870CEA}"/>
               </a:ext>
             </a:extLst>
           </p:cNvPr>
@@ -2721,7 +2608,7 @@
           <p:cNvPr id="7" name="Rectangle 6">
             <a:extLst>
               <a:ext uri="{FF2B5EF4-FFF2-40B4-BE49-F238E27FC236}">
-                <a16:creationId xmlns:a16="http://schemas.microsoft.com/office/drawing/2014/main" id="{AA78B719-7910-4237-8CCE-7F99D8AE3101}"/>
+                <a16:creationId xmlns:a16="http://schemas.microsoft.com/office/drawing/2014/main" id="{B6D5D063-5837-4A4F-AA84-1A03AC9F960C}"/>
               </a:ext>
             </a:extLst>
           </p:cNvPr>
@@ -2771,7 +2658,7 @@
           <p:cNvPr id="8" name="Rectangle 7">
             <a:extLst>
               <a:ext uri="{FF2B5EF4-FFF2-40B4-BE49-F238E27FC236}">
-                <a16:creationId xmlns:a16="http://schemas.microsoft.com/office/drawing/2014/main" id="{7B39B54D-59F8-40D1-B906-8111DBDE2CD5}"/>
+                <a16:creationId xmlns:a16="http://schemas.microsoft.com/office/drawing/2014/main" id="{9CCE2CF4-F1A2-495A-B165-6CACAFBE63EB}"/>
               </a:ext>
             </a:extLst>
           </p:cNvPr>
@@ -2821,7 +2708,7 @@
           <p:cNvPr id="9" name="Rectangle 8">
             <a:extLst>
               <a:ext uri="{FF2B5EF4-FFF2-40B4-BE49-F238E27FC236}">
-                <a16:creationId xmlns:a16="http://schemas.microsoft.com/office/drawing/2014/main" id="{8225647C-DB02-4434-8542-9669197B6C63}"/>
+                <a16:creationId xmlns:a16="http://schemas.microsoft.com/office/drawing/2014/main" id="{802A91E4-0E1B-4D02-AF0C-3812FB66B7B8}"/>
               </a:ext>
             </a:extLst>
           </p:cNvPr>
@@ -2859,7 +2746,7 @@
           <p:cNvPr id="10" name="Rectangle 9">
             <a:extLst>
               <a:ext uri="{FF2B5EF4-FFF2-40B4-BE49-F238E27FC236}">
-                <a16:creationId xmlns:a16="http://schemas.microsoft.com/office/drawing/2014/main" id="{EB0AC10D-7925-4019-998B-CB14511E77AF}"/>
+                <a16:creationId xmlns:a16="http://schemas.microsoft.com/office/drawing/2014/main" id="{86CEA381-1B12-471D-A426-FB856ED5BDC0}"/>
               </a:ext>
             </a:extLst>
           </p:cNvPr>
@@ -2909,7 +2796,7 @@
           <p:cNvPr id="11" name="Rectangle 10">
             <a:extLst>
               <a:ext uri="{FF2B5EF4-FFF2-40B4-BE49-F238E27FC236}">
-                <a16:creationId xmlns:a16="http://schemas.microsoft.com/office/drawing/2014/main" id="{FFBF3692-4F82-4528-9B67-BA0062ECEA36}"/>
+                <a16:creationId xmlns:a16="http://schemas.microsoft.com/office/drawing/2014/main" id="{AE82D588-D0B1-42AE-9E26-367B4DDE81E2}"/>
               </a:ext>
             </a:extLst>
           </p:cNvPr>
@@ -2959,7 +2846,7 @@
           <p:cNvPr id="12" name="Rectangle 11">
             <a:extLst>
               <a:ext uri="{FF2B5EF4-FFF2-40B4-BE49-F238E27FC236}">
-                <a16:creationId xmlns:a16="http://schemas.microsoft.com/office/drawing/2014/main" id="{3EB44B6B-699D-4986-B987-EF2A5FA70498}"/>
+                <a16:creationId xmlns:a16="http://schemas.microsoft.com/office/drawing/2014/main" id="{487D565A-CE47-4550-8DC5-A3FF7902C727}"/>
               </a:ext>
             </a:extLst>
           </p:cNvPr>
@@ -2997,7 +2884,7 @@
           <p:cNvPr id="13" name="Rectangle 12">
             <a:extLst>
               <a:ext uri="{FF2B5EF4-FFF2-40B4-BE49-F238E27FC236}">
-                <a16:creationId xmlns:a16="http://schemas.microsoft.com/office/drawing/2014/main" id="{85AB7BD2-4B0E-4217-8CCC-EA69A9D8178F}"/>
+                <a16:creationId xmlns:a16="http://schemas.microsoft.com/office/drawing/2014/main" id="{56ECF696-1F55-4A63-9774-7AF38560402D}"/>
               </a:ext>
             </a:extLst>
           </p:cNvPr>
@@ -3032,34 +2919,37 @@
               </a:defRPr>
             </a:pPr>
             <a:r>
+              <a:rPr sz="2325" b="1" dirty="0" err="1">
+                <a:solidFill>
+                  <a:srgbClr val="111827"/>
+                </a:solidFill>
+              </a:rPr>
+              <a:t>我要比較的是</a:t>
+            </a:r>
+            <a:r>
+              <a:rPr lang="en-TW" sz="2325" b="1" dirty="0">
+                <a:solidFill>
+                  <a:srgbClr val="111827"/>
+                </a:solidFill>
+              </a:rPr>
+              <a:t>：</a:t>
+            </a:r>
+          </a:p>
+          <a:p>
+            <a:pPr>
+              <a:defRPr sz="2325" b="1">
+                <a:solidFill>
+                  <a:srgbClr val="111827"/>
+                </a:solidFill>
+              </a:defRPr>
+            </a:pPr>
+            <a:r>
               <a:rPr lang="zh-TW" altLang="en-US" sz="2325" b="1" dirty="0">
                 <a:solidFill>
                   <a:srgbClr val="111827"/>
                 </a:solidFill>
               </a:rPr>
-              <a:t>我要比較的是：</a:t>
-            </a:r>
-            <a:endParaRPr lang="en-US" altLang="zh-TW" sz="2325" b="1" dirty="0">
-              <a:solidFill>
-                <a:srgbClr val="111827"/>
-              </a:solidFill>
-            </a:endParaRPr>
-          </a:p>
-          <a:p>
-            <a:pPr>
-              <a:defRPr sz="2325" b="1">
-                <a:solidFill>
-                  <a:srgbClr val="111827"/>
-                </a:solidFill>
-              </a:defRPr>
-            </a:pPr>
-            <a:r>
-              <a:rPr lang="zh-TW" altLang="en-US" sz="2325" b="1" dirty="0">
-                <a:solidFill>
-                  <a:srgbClr val="111827"/>
-                </a:solidFill>
-              </a:rPr>
-              <a:t>不同案件類型、文字特徵與模型流程，會不會帶來不同的分類效果？</a:t>
+              <a:t>不同案件類型、文字表示與模型流程，會不會帶來不同的分類效果？</a:t>
             </a:r>
           </a:p>
         </p:txBody>
@@ -3069,7 +2959,7 @@
           <p:cNvPr id="14" name="Rectangle 13">
             <a:extLst>
               <a:ext uri="{FF2B5EF4-FFF2-40B4-BE49-F238E27FC236}">
-                <a16:creationId xmlns:a16="http://schemas.microsoft.com/office/drawing/2014/main" id="{ED08E1A5-B6B6-498A-8289-E6348CF6F731}"/>
+                <a16:creationId xmlns:a16="http://schemas.microsoft.com/office/drawing/2014/main" id="{CE63867E-3BB5-4C72-B81F-45F8FB446B7C}"/>
               </a:ext>
             </a:extLst>
           </p:cNvPr>
@@ -3116,7 +3006,7 @@
           <p:cNvPr id="15" name="Rectangle 14">
             <a:extLst>
               <a:ext uri="{FF2B5EF4-FFF2-40B4-BE49-F238E27FC236}">
-                <a16:creationId xmlns:a16="http://schemas.microsoft.com/office/drawing/2014/main" id="{01635535-4F0D-48F0-9840-EC6BC2ADAF77}"/>
+                <a16:creationId xmlns:a16="http://schemas.microsoft.com/office/drawing/2014/main" id="{FD42A170-70F9-449B-B2D4-1BA3758C5DE2}"/>
               </a:ext>
             </a:extLst>
           </p:cNvPr>
@@ -3154,7 +3044,7 @@
           <p:cNvPr id="16" name="Rectangle 15">
             <a:extLst>
               <a:ext uri="{FF2B5EF4-FFF2-40B4-BE49-F238E27FC236}">
-                <a16:creationId xmlns:a16="http://schemas.microsoft.com/office/drawing/2014/main" id="{480F08F4-C9D1-4646-8EB0-BB41847D6979}"/>
+                <a16:creationId xmlns:a16="http://schemas.microsoft.com/office/drawing/2014/main" id="{924AEE80-F902-40E0-8400-B140A3DBA931}"/>
               </a:ext>
             </a:extLst>
           </p:cNvPr>
@@ -3221,57 +3111,7 @@
           <p:cNvPr id="17" name="Rectangle 16">
             <a:extLst>
               <a:ext uri="{FF2B5EF4-FFF2-40B4-BE49-F238E27FC236}">
-                <a16:creationId xmlns:a16="http://schemas.microsoft.com/office/drawing/2014/main" id="{3ED7788C-AC63-4637-B1B1-268674BE0568}"/>
-              </a:ext>
-            </a:extLst>
-          </p:cNvPr>
-          <p:cNvSpPr>
-            <a:spLocks noGrp="1"/>
-          </p:cNvSpPr>
-          <p:nvPr/>
-        </p:nvSpPr>
-        <p:spPr>
-          <a:xfrm>
-            <a:off x="685800" y="6457950"/>
-            <a:ext cx="3333750" cy="152400"/>
-          </a:xfrm>
-          <a:prstGeom prst="rect">
-            <a:avLst/>
-          </a:prstGeom>
-          <a:noFill/>
-          <a:ln w="0">
-            <a:noFill/>
-            <a:prstDash val="solid"/>
-          </a:ln>
-        </p:spPr>
-        <p:txBody>
-          <a:bodyPr anchor="ctr"/>
-          <a:lstStyle/>
-          <a:p>
-            <a:pPr>
-              <a:defRPr sz="825" b="0">
-                <a:solidFill>
-                  <a:srgbClr val="5D6775"/>
-                </a:solidFill>
-              </a:defRPr>
-            </a:pPr>
-            <a:r>
-              <a:rPr sz="825" b="0">
-                <a:solidFill>
-                  <a:srgbClr val="5D6775"/>
-                </a:solidFill>
-              </a:rPr>
-              <a:t>崇越論文大賞決賽  |  M0263</a:t>
-            </a:r>
-          </a:p>
-        </p:txBody>
-      </p:sp>
-      <p:sp>
-        <p:nvSpPr>
-          <p:cNvPr id="18" name="Rectangle 17">
-            <a:extLst>
-              <a:ext uri="{FF2B5EF4-FFF2-40B4-BE49-F238E27FC236}">
-                <a16:creationId xmlns:a16="http://schemas.microsoft.com/office/drawing/2014/main" id="{08C5038A-3A75-4FF5-9E25-210AC6895690}"/>
+                <a16:creationId xmlns:a16="http://schemas.microsoft.com/office/drawing/2014/main" id="{06C2BCC1-26BD-4851-88BC-EF66EAEF08A5}"/>
               </a:ext>
             </a:extLst>
           </p:cNvPr>
@@ -3319,7 +3159,7 @@
     </p:spTree>
     <p:extLst>
       <p:ext uri="{BB962C8B-B14F-4D97-AF65-F5344CB8AC3E}">
-        <p14:creationId xmlns:p14="http://schemas.microsoft.com/office/powerpoint/2010/main" val="1107058645"/>
+        <p14:creationId xmlns:p14="http://schemas.microsoft.com/office/powerpoint/2010/main" val="1571225149"/>
       </p:ext>
     </p:extLst>
   </p:cSld>
@@ -3356,10 +3196,10 @@
       </p:grpSpPr>
       <p:sp>
         <p:nvSpPr>
-          <p:cNvPr id="21" name="Rectangle 20">
-            <a:extLst>
-              <a:ext uri="{FF2B5EF4-FFF2-40B4-BE49-F238E27FC236}">
-                <a16:creationId xmlns:a16="http://schemas.microsoft.com/office/drawing/2014/main" id="{EEADB099-AB2E-465E-A817-B62A05DCA991}"/>
+          <p:cNvPr id="20" name="Rectangle 19">
+            <a:extLst>
+              <a:ext uri="{FF2B5EF4-FFF2-40B4-BE49-F238E27FC236}">
+                <a16:creationId xmlns:a16="http://schemas.microsoft.com/office/drawing/2014/main" id="{400757C8-BD4F-4623-8D56-12BBBBEE5DDB}"/>
               </a:ext>
             </a:extLst>
           </p:cNvPr>
@@ -3409,7 +3249,7 @@
           <p:cNvPr id="2" name="title">
             <a:extLst>
               <a:ext uri="{FF2B5EF4-FFF2-40B4-BE49-F238E27FC236}">
-                <a16:creationId xmlns:a16="http://schemas.microsoft.com/office/drawing/2014/main" id="{2F18CF8C-456D-4DA5-9B8F-1400583A8BB0}"/>
+                <a16:creationId xmlns:a16="http://schemas.microsoft.com/office/drawing/2014/main" id="{7DB80FF5-019E-45BF-BBC3-7AFC8161C514}"/>
               </a:ext>
             </a:extLst>
           </p:cNvPr>
@@ -3459,7 +3299,7 @@
           <p:cNvPr id="3" name="Rectangle 2">
             <a:extLst>
               <a:ext uri="{FF2B5EF4-FFF2-40B4-BE49-F238E27FC236}">
-                <a16:creationId xmlns:a16="http://schemas.microsoft.com/office/drawing/2014/main" id="{74A552C6-B81D-448E-88E5-E9F8889393D7}"/>
+                <a16:creationId xmlns:a16="http://schemas.microsoft.com/office/drawing/2014/main" id="{B6E28546-B08A-4798-A981-8F04A684D432}"/>
               </a:ext>
             </a:extLst>
           </p:cNvPr>
@@ -3509,7 +3349,7 @@
           <p:cNvPr id="4" name="Rectangle 3">
             <a:extLst>
               <a:ext uri="{FF2B5EF4-FFF2-40B4-BE49-F238E27FC236}">
-                <a16:creationId xmlns:a16="http://schemas.microsoft.com/office/drawing/2014/main" id="{D5FF572B-CC5D-4DB5-9DC5-001835EE3D65}"/>
+                <a16:creationId xmlns:a16="http://schemas.microsoft.com/office/drawing/2014/main" id="{15DFBE26-3B70-45A9-8CA7-06294821A20C}"/>
               </a:ext>
             </a:extLst>
           </p:cNvPr>
@@ -3547,7 +3387,7 @@
           <p:cNvPr id="5" name="Rectangle 4">
             <a:extLst>
               <a:ext uri="{FF2B5EF4-FFF2-40B4-BE49-F238E27FC236}">
-                <a16:creationId xmlns:a16="http://schemas.microsoft.com/office/drawing/2014/main" id="{9E0BC028-EF93-473A-913E-2ADDCAEE80B6}"/>
+                <a16:creationId xmlns:a16="http://schemas.microsoft.com/office/drawing/2014/main" id="{16961C81-B5C9-432E-B56C-CF7E88BBDF88}"/>
               </a:ext>
             </a:extLst>
           </p:cNvPr>
@@ -3597,7 +3437,7 @@
           <p:cNvPr id="6" name="Rectangle 5">
             <a:extLst>
               <a:ext uri="{FF2B5EF4-FFF2-40B4-BE49-F238E27FC236}">
-                <a16:creationId xmlns:a16="http://schemas.microsoft.com/office/drawing/2014/main" id="{82517CFD-7BD6-4F68-8105-6A353C8E96D7}"/>
+                <a16:creationId xmlns:a16="http://schemas.microsoft.com/office/drawing/2014/main" id="{619B3CC6-79EE-44DF-A325-79E46BA7B6E6}"/>
               </a:ext>
             </a:extLst>
           </p:cNvPr>
@@ -3647,18 +3487,18 @@
           <p:cNvPr id="7" name="Rectangle 6">
             <a:extLst>
               <a:ext uri="{FF2B5EF4-FFF2-40B4-BE49-F238E27FC236}">
-                <a16:creationId xmlns:a16="http://schemas.microsoft.com/office/drawing/2014/main" id="{98346D04-6258-4683-9934-D8953413F279}"/>
-              </a:ext>
-            </a:extLst>
-          </p:cNvPr>
-          <p:cNvSpPr>
-            <a:spLocks noGrp="1"/>
-          </p:cNvSpPr>
-          <p:nvPr/>
-        </p:nvSpPr>
-        <p:spPr>
-          <a:xfrm>
-            <a:off x="3371850" y="2962275"/>
+                <a16:creationId xmlns:a16="http://schemas.microsoft.com/office/drawing/2014/main" id="{E52AE38F-15BF-4EC2-9CA2-08C6A49CCBB8}"/>
+              </a:ext>
+            </a:extLst>
+          </p:cNvPr>
+          <p:cNvSpPr>
+            <a:spLocks noGrp="1"/>
+          </p:cNvSpPr>
+          <p:nvPr/>
+        </p:nvSpPr>
+        <p:spPr>
+          <a:xfrm>
+            <a:off x="3257550" y="3037146"/>
             <a:ext cx="2381250" cy="552450"/>
           </a:xfrm>
           <a:prstGeom prst="rect">
@@ -3724,7 +3564,7 @@
           <p:cNvPr id="8" name="Rectangle 7">
             <a:extLst>
               <a:ext uri="{FF2B5EF4-FFF2-40B4-BE49-F238E27FC236}">
-                <a16:creationId xmlns:a16="http://schemas.microsoft.com/office/drawing/2014/main" id="{4E86D93A-0B65-4D52-8BBF-ED4A0B379F5F}"/>
+                <a16:creationId xmlns:a16="http://schemas.microsoft.com/office/drawing/2014/main" id="{53365098-BBFA-4901-8F03-560BA7404A70}"/>
               </a:ext>
             </a:extLst>
           </p:cNvPr>
@@ -3762,7 +3602,7 @@
           <p:cNvPr id="9" name="Rectangle 8">
             <a:extLst>
               <a:ext uri="{FF2B5EF4-FFF2-40B4-BE49-F238E27FC236}">
-                <a16:creationId xmlns:a16="http://schemas.microsoft.com/office/drawing/2014/main" id="{EA8B345A-F84F-4032-AAF8-2D30ED2ECD45}"/>
+                <a16:creationId xmlns:a16="http://schemas.microsoft.com/office/drawing/2014/main" id="{1222DE40-BE0F-4436-989C-754CFC108D6A}"/>
               </a:ext>
             </a:extLst>
           </p:cNvPr>
@@ -3812,7 +3652,7 @@
           <p:cNvPr id="10" name="Rectangle 9">
             <a:extLst>
               <a:ext uri="{FF2B5EF4-FFF2-40B4-BE49-F238E27FC236}">
-                <a16:creationId xmlns:a16="http://schemas.microsoft.com/office/drawing/2014/main" id="{8CAE8FE5-978B-4E9E-9058-4506E9640E9A}"/>
+                <a16:creationId xmlns:a16="http://schemas.microsoft.com/office/drawing/2014/main" id="{0064D289-E9C3-4383-9F5A-6E4AC2EE4C1B}"/>
               </a:ext>
             </a:extLst>
           </p:cNvPr>
@@ -3862,7 +3702,7 @@
           <p:cNvPr id="11" name="Rectangle 10">
             <a:extLst>
               <a:ext uri="{FF2B5EF4-FFF2-40B4-BE49-F238E27FC236}">
-                <a16:creationId xmlns:a16="http://schemas.microsoft.com/office/drawing/2014/main" id="{4A8F91BB-EEA2-4916-B213-70DF2B836E09}"/>
+                <a16:creationId xmlns:a16="http://schemas.microsoft.com/office/drawing/2014/main" id="{828FD2B3-8818-4912-B961-18644031277D}"/>
               </a:ext>
             </a:extLst>
           </p:cNvPr>
@@ -3912,7 +3752,7 @@
           <p:cNvPr id="12" name="Rectangle 11">
             <a:extLst>
               <a:ext uri="{FF2B5EF4-FFF2-40B4-BE49-F238E27FC236}">
-                <a16:creationId xmlns:a16="http://schemas.microsoft.com/office/drawing/2014/main" id="{A8B1B1BE-D8DC-4A1C-BF3B-0B32474428D7}"/>
+                <a16:creationId xmlns:a16="http://schemas.microsoft.com/office/drawing/2014/main" id="{8240C8E5-A807-4BA7-B946-856D85F3FC18}"/>
               </a:ext>
             </a:extLst>
           </p:cNvPr>
@@ -3962,7 +3802,7 @@
           <p:cNvPr id="13" name="Rectangle 12">
             <a:extLst>
               <a:ext uri="{FF2B5EF4-FFF2-40B4-BE49-F238E27FC236}">
-                <a16:creationId xmlns:a16="http://schemas.microsoft.com/office/drawing/2014/main" id="{CD013768-9435-4FF6-BF52-C177DC1D8259}"/>
+                <a16:creationId xmlns:a16="http://schemas.microsoft.com/office/drawing/2014/main" id="{7B9AAB1C-5095-4824-A5F8-BDC1509FFBD7}"/>
               </a:ext>
             </a:extLst>
           </p:cNvPr>
@@ -4012,7 +3852,7 @@
           <p:cNvPr id="14" name="Rectangle 13">
             <a:extLst>
               <a:ext uri="{FF2B5EF4-FFF2-40B4-BE49-F238E27FC236}">
-                <a16:creationId xmlns:a16="http://schemas.microsoft.com/office/drawing/2014/main" id="{3613A50B-A2A5-4875-A468-D93D9A141754}"/>
+                <a16:creationId xmlns:a16="http://schemas.microsoft.com/office/drawing/2014/main" id="{76878632-537D-4391-A0B7-6C5F001E99A8}"/>
               </a:ext>
             </a:extLst>
           </p:cNvPr>
@@ -4062,7 +3902,7 @@
           <p:cNvPr id="15" name="Rectangle 14">
             <a:extLst>
               <a:ext uri="{FF2B5EF4-FFF2-40B4-BE49-F238E27FC236}">
-                <a16:creationId xmlns:a16="http://schemas.microsoft.com/office/drawing/2014/main" id="{6F230289-BBF2-42F8-9A5B-3A1B74FD22E5}"/>
+                <a16:creationId xmlns:a16="http://schemas.microsoft.com/office/drawing/2014/main" id="{15B21EF5-3BCD-496E-8939-E2C72B0A505B}"/>
               </a:ext>
             </a:extLst>
           </p:cNvPr>
@@ -4100,7 +3940,7 @@
           <p:cNvPr id="16" name="Rectangle 15">
             <a:extLst>
               <a:ext uri="{FF2B5EF4-FFF2-40B4-BE49-F238E27FC236}">
-                <a16:creationId xmlns:a16="http://schemas.microsoft.com/office/drawing/2014/main" id="{6B2C89C7-A026-472A-9572-0D9246736257}"/>
+                <a16:creationId xmlns:a16="http://schemas.microsoft.com/office/drawing/2014/main" id="{18314782-213C-4C1A-98D7-29CAAF6A65B7}"/>
               </a:ext>
             </a:extLst>
           </p:cNvPr>
@@ -4150,7 +3990,7 @@
           <p:cNvPr id="17" name="Rectangle 16">
             <a:extLst>
               <a:ext uri="{FF2B5EF4-FFF2-40B4-BE49-F238E27FC236}">
-                <a16:creationId xmlns:a16="http://schemas.microsoft.com/office/drawing/2014/main" id="{5BD149BB-01A4-4022-A59D-E78EC57793A9}"/>
+                <a16:creationId xmlns:a16="http://schemas.microsoft.com/office/drawing/2014/main" id="{F179F9E5-F67B-464F-AE27-BFC249E7FE25}"/>
               </a:ext>
             </a:extLst>
           </p:cNvPr>
@@ -4217,7 +4057,7 @@
           <p:cNvPr id="18" name="Rectangle 17">
             <a:extLst>
               <a:ext uri="{FF2B5EF4-FFF2-40B4-BE49-F238E27FC236}">
-                <a16:creationId xmlns:a16="http://schemas.microsoft.com/office/drawing/2014/main" id="{83669606-BAA1-4D66-A56A-7D934EBE849A}"/>
+                <a16:creationId xmlns:a16="http://schemas.microsoft.com/office/drawing/2014/main" id="{32277991-2EFF-4FA1-BF66-D3A6BC6C0E53}"/>
               </a:ext>
             </a:extLst>
           </p:cNvPr>
@@ -4267,57 +4107,7 @@
           <p:cNvPr id="19" name="Rectangle 18">
             <a:extLst>
               <a:ext uri="{FF2B5EF4-FFF2-40B4-BE49-F238E27FC236}">
-                <a16:creationId xmlns:a16="http://schemas.microsoft.com/office/drawing/2014/main" id="{AA85F8AA-11CD-4F17-90C1-5EDC587588FF}"/>
-              </a:ext>
-            </a:extLst>
-          </p:cNvPr>
-          <p:cNvSpPr>
-            <a:spLocks noGrp="1"/>
-          </p:cNvSpPr>
-          <p:nvPr/>
-        </p:nvSpPr>
-        <p:spPr>
-          <a:xfrm>
-            <a:off x="685800" y="6457950"/>
-            <a:ext cx="3333750" cy="152400"/>
-          </a:xfrm>
-          <a:prstGeom prst="rect">
-            <a:avLst/>
-          </a:prstGeom>
-          <a:noFill/>
-          <a:ln w="0">
-            <a:noFill/>
-            <a:prstDash val="solid"/>
-          </a:ln>
-        </p:spPr>
-        <p:txBody>
-          <a:bodyPr anchor="ctr"/>
-          <a:lstStyle/>
-          <a:p>
-            <a:pPr>
-              <a:defRPr sz="825" b="0">
-                <a:solidFill>
-                  <a:srgbClr val="5D6775"/>
-                </a:solidFill>
-              </a:defRPr>
-            </a:pPr>
-            <a:r>
-              <a:rPr sz="825" b="0">
-                <a:solidFill>
-                  <a:srgbClr val="5D6775"/>
-                </a:solidFill>
-              </a:rPr>
-              <a:t>崇越論文大賞決賽  |  M0263</a:t>
-            </a:r>
-          </a:p>
-        </p:txBody>
-      </p:sp>
-      <p:sp>
-        <p:nvSpPr>
-          <p:cNvPr id="20" name="Rectangle 19">
-            <a:extLst>
-              <a:ext uri="{FF2B5EF4-FFF2-40B4-BE49-F238E27FC236}">
-                <a16:creationId xmlns:a16="http://schemas.microsoft.com/office/drawing/2014/main" id="{BBC9B861-BEAA-46E0-9107-C9F3E4492CBB}"/>
+                <a16:creationId xmlns:a16="http://schemas.microsoft.com/office/drawing/2014/main" id="{20DAE7B2-07BA-4007-9ED4-D56FBC458A55}"/>
               </a:ext>
             </a:extLst>
           </p:cNvPr>
@@ -4364,10 +4154,10 @@
       </p:sp>
       <p:sp>
         <p:nvSpPr>
-          <p:cNvPr id="22" name="Down Arrow 21">
-            <a:extLst>
-              <a:ext uri="{FF2B5EF4-FFF2-40B4-BE49-F238E27FC236}">
-                <a16:creationId xmlns:a16="http://schemas.microsoft.com/office/drawing/2014/main" id="{97FB5D0D-C0BC-81CE-67A3-7CDEBE7BE995}"/>
+          <p:cNvPr id="21" name="Right Arrow 20">
+            <a:extLst>
+              <a:ext uri="{FF2B5EF4-FFF2-40B4-BE49-F238E27FC236}">
+                <a16:creationId xmlns:a16="http://schemas.microsoft.com/office/drawing/2014/main" id="{18305F41-8AF5-D760-9610-589B73A5964D}"/>
               </a:ext>
             </a:extLst>
           </p:cNvPr>
@@ -4375,18 +4165,21 @@
           <p:nvPr/>
         </p:nvSpPr>
         <p:spPr>
-          <a:xfrm rot="16200000">
-            <a:off x="4123164" y="1103739"/>
-            <a:ext cx="400045" cy="3126527"/>
-          </a:xfrm>
-          <a:prstGeom prst="downArrow">
+          <a:xfrm>
+            <a:off x="3147237" y="2400300"/>
+            <a:ext cx="2339163" cy="447675"/>
+          </a:xfrm>
+          <a:prstGeom prst="rightArrow">
             <a:avLst>
               <a:gd name="adj1" fmla="val 50000"/>
-              <a:gd name="adj2" fmla="val 161629"/>
+              <a:gd name="adj2" fmla="val 171128"/>
             </a:avLst>
           </a:prstGeom>
           <a:solidFill>
-            <a:schemeClr val="tx1"/>
+            <a:schemeClr val="tx1">
+              <a:lumMod val="65000"/>
+              <a:lumOff val="35000"/>
+            </a:schemeClr>
           </a:solidFill>
           <a:ln>
             <a:noFill/>
@@ -4420,7 +4213,7 @@
     </p:spTree>
     <p:extLst>
       <p:ext uri="{BB962C8B-B14F-4D97-AF65-F5344CB8AC3E}">
-        <p14:creationId xmlns:p14="http://schemas.microsoft.com/office/powerpoint/2010/main" val="656530841"/>
+        <p14:creationId xmlns:p14="http://schemas.microsoft.com/office/powerpoint/2010/main" val="1979035589"/>
       </p:ext>
     </p:extLst>
   </p:cSld>
@@ -4457,10 +4250,10 @@
       </p:grpSpPr>
       <p:sp>
         <p:nvSpPr>
-          <p:cNvPr id="34" name="Rectangle 33">
-            <a:extLst>
-              <a:ext uri="{FF2B5EF4-FFF2-40B4-BE49-F238E27FC236}">
-                <a16:creationId xmlns:a16="http://schemas.microsoft.com/office/drawing/2014/main" id="{CB7C912D-5FA0-42D4-A211-7F860467C321}"/>
+          <p:cNvPr id="33" name="Rectangle 32">
+            <a:extLst>
+              <a:ext uri="{FF2B5EF4-FFF2-40B4-BE49-F238E27FC236}">
+                <a16:creationId xmlns:a16="http://schemas.microsoft.com/office/drawing/2014/main" id="{26BC15B7-0416-46DB-85E7-2FD17C4B84AF}"/>
               </a:ext>
             </a:extLst>
           </p:cNvPr>
@@ -4510,7 +4303,7 @@
           <p:cNvPr id="2" name="title">
             <a:extLst>
               <a:ext uri="{FF2B5EF4-FFF2-40B4-BE49-F238E27FC236}">
-                <a16:creationId xmlns:a16="http://schemas.microsoft.com/office/drawing/2014/main" id="{210BDC8F-5EDE-4F96-935C-88EA5B727BB5}"/>
+                <a16:creationId xmlns:a16="http://schemas.microsoft.com/office/drawing/2014/main" id="{E8F13F2F-6FA4-4B2B-8D7F-CD8716E3650A}"/>
               </a:ext>
             </a:extLst>
           </p:cNvPr>
@@ -4560,7 +4353,7 @@
           <p:cNvPr id="3" name="Rectangle 2">
             <a:extLst>
               <a:ext uri="{FF2B5EF4-FFF2-40B4-BE49-F238E27FC236}">
-                <a16:creationId xmlns:a16="http://schemas.microsoft.com/office/drawing/2014/main" id="{AAD46A12-80C1-4047-8449-04122E101DE3}"/>
+                <a16:creationId xmlns:a16="http://schemas.microsoft.com/office/drawing/2014/main" id="{19B2FA78-B1C2-4D5A-8ACA-C1FC2C6610A4}"/>
               </a:ext>
             </a:extLst>
           </p:cNvPr>
@@ -4610,7 +4403,7 @@
           <p:cNvPr id="4" name="Rectangle 3">
             <a:extLst>
               <a:ext uri="{FF2B5EF4-FFF2-40B4-BE49-F238E27FC236}">
-                <a16:creationId xmlns:a16="http://schemas.microsoft.com/office/drawing/2014/main" id="{7932A4BD-8E8D-4C36-9DC7-CDC0349651CF}"/>
+                <a16:creationId xmlns:a16="http://schemas.microsoft.com/office/drawing/2014/main" id="{73B0A641-3BC0-4760-98B3-27F9D5130579}"/>
               </a:ext>
             </a:extLst>
           </p:cNvPr>
@@ -4648,7 +4441,7 @@
           <p:cNvPr id="5" name="Rectangle 4">
             <a:extLst>
               <a:ext uri="{FF2B5EF4-FFF2-40B4-BE49-F238E27FC236}">
-                <a16:creationId xmlns:a16="http://schemas.microsoft.com/office/drawing/2014/main" id="{9F709457-1E86-4D6A-8E94-8FEB1A1FB706}"/>
+                <a16:creationId xmlns:a16="http://schemas.microsoft.com/office/drawing/2014/main" id="{796F529E-7B16-4516-943C-A1A5B5FA29F6}"/>
               </a:ext>
             </a:extLst>
           </p:cNvPr>
@@ -4686,7 +4479,7 @@
           <p:cNvPr id="6" name="Rectangle 5">
             <a:extLst>
               <a:ext uri="{FF2B5EF4-FFF2-40B4-BE49-F238E27FC236}">
-                <a16:creationId xmlns:a16="http://schemas.microsoft.com/office/drawing/2014/main" id="{A5C56B9B-F978-4F45-ACB2-7B78ACF75BBD}"/>
+                <a16:creationId xmlns:a16="http://schemas.microsoft.com/office/drawing/2014/main" id="{C30D1467-26D0-4750-8A69-BA9164563552}"/>
               </a:ext>
             </a:extLst>
           </p:cNvPr>
@@ -4753,7 +4546,7 @@
           <p:cNvPr id="7" name="Rectangle 6">
             <a:extLst>
               <a:ext uri="{FF2B5EF4-FFF2-40B4-BE49-F238E27FC236}">
-                <a16:creationId xmlns:a16="http://schemas.microsoft.com/office/drawing/2014/main" id="{A1176E4E-2F33-4DF3-8977-CDA5E07A057D}"/>
+                <a16:creationId xmlns:a16="http://schemas.microsoft.com/office/drawing/2014/main" id="{D8A77903-82C5-475C-B12F-8677C0E85F6F}"/>
               </a:ext>
             </a:extLst>
           </p:cNvPr>
@@ -4803,7 +4596,7 @@
           <p:cNvPr id="8" name="Rectangle 7">
             <a:extLst>
               <a:ext uri="{FF2B5EF4-FFF2-40B4-BE49-F238E27FC236}">
-                <a16:creationId xmlns:a16="http://schemas.microsoft.com/office/drawing/2014/main" id="{5AD9D60A-C04B-46E3-A21C-32950B7C934E}"/>
+                <a16:creationId xmlns:a16="http://schemas.microsoft.com/office/drawing/2014/main" id="{4683A192-4F59-4C76-9FCF-0DFFAA2271E8}"/>
               </a:ext>
             </a:extLst>
           </p:cNvPr>
@@ -4841,7 +4634,7 @@
           <p:cNvPr id="9" name="Rectangle 8">
             <a:extLst>
               <a:ext uri="{FF2B5EF4-FFF2-40B4-BE49-F238E27FC236}">
-                <a16:creationId xmlns:a16="http://schemas.microsoft.com/office/drawing/2014/main" id="{EDD90A4C-3B99-428F-BC96-9F15E5DB8286}"/>
+                <a16:creationId xmlns:a16="http://schemas.microsoft.com/office/drawing/2014/main" id="{2D34F792-9290-45FA-86DF-EECB16EAEC36}"/>
               </a:ext>
             </a:extLst>
           </p:cNvPr>
@@ -4891,7 +4684,7 @@
           <p:cNvPr id="10" name="Rectangle 9">
             <a:extLst>
               <a:ext uri="{FF2B5EF4-FFF2-40B4-BE49-F238E27FC236}">
-                <a16:creationId xmlns:a16="http://schemas.microsoft.com/office/drawing/2014/main" id="{330954F4-B2F8-4C2A-A198-B71A33813DE7}"/>
+                <a16:creationId xmlns:a16="http://schemas.microsoft.com/office/drawing/2014/main" id="{15EAFC2F-3C89-4AB1-B634-246C7F82B422}"/>
               </a:ext>
             </a:extLst>
           </p:cNvPr>
@@ -4941,7 +4734,7 @@
           <p:cNvPr id="11" name="Rectangle 10">
             <a:extLst>
               <a:ext uri="{FF2B5EF4-FFF2-40B4-BE49-F238E27FC236}">
-                <a16:creationId xmlns:a16="http://schemas.microsoft.com/office/drawing/2014/main" id="{B9493FE1-2FC6-419E-B63F-E9173B71EA6A}"/>
+                <a16:creationId xmlns:a16="http://schemas.microsoft.com/office/drawing/2014/main" id="{44F0EF49-DEF5-49CE-AD02-D8ACEEA5EDF2}"/>
               </a:ext>
             </a:extLst>
           </p:cNvPr>
@@ -4979,7 +4772,7 @@
           <p:cNvPr id="12" name="Rectangle 11">
             <a:extLst>
               <a:ext uri="{FF2B5EF4-FFF2-40B4-BE49-F238E27FC236}">
-                <a16:creationId xmlns:a16="http://schemas.microsoft.com/office/drawing/2014/main" id="{2DA685A8-24D7-46AC-A2EF-A69F545596E3}"/>
+                <a16:creationId xmlns:a16="http://schemas.microsoft.com/office/drawing/2014/main" id="{AD6CA64C-6049-47AC-B81D-D0B2616C68AB}"/>
               </a:ext>
             </a:extLst>
           </p:cNvPr>
@@ -5029,7 +4822,7 @@
           <p:cNvPr id="13" name="Rectangle 12">
             <a:extLst>
               <a:ext uri="{FF2B5EF4-FFF2-40B4-BE49-F238E27FC236}">
-                <a16:creationId xmlns:a16="http://schemas.microsoft.com/office/drawing/2014/main" id="{5E327815-7131-473E-928D-C1BF5B45F7C1}"/>
+                <a16:creationId xmlns:a16="http://schemas.microsoft.com/office/drawing/2014/main" id="{98C0193D-558B-4BD5-AE1E-2AE0F37D3FFE}"/>
               </a:ext>
             </a:extLst>
           </p:cNvPr>
@@ -5079,7 +4872,7 @@
           <p:cNvPr id="14" name="Rectangle 13">
             <a:extLst>
               <a:ext uri="{FF2B5EF4-FFF2-40B4-BE49-F238E27FC236}">
-                <a16:creationId xmlns:a16="http://schemas.microsoft.com/office/drawing/2014/main" id="{6E52E171-5925-4057-8D24-52428BACCEF7}"/>
+                <a16:creationId xmlns:a16="http://schemas.microsoft.com/office/drawing/2014/main" id="{1F8AF307-327C-4DF5-8662-DD8C756822A1}"/>
               </a:ext>
             </a:extLst>
           </p:cNvPr>
@@ -5117,7 +4910,7 @@
           <p:cNvPr id="15" name="Rectangle 14">
             <a:extLst>
               <a:ext uri="{FF2B5EF4-FFF2-40B4-BE49-F238E27FC236}">
-                <a16:creationId xmlns:a16="http://schemas.microsoft.com/office/drawing/2014/main" id="{60C721A6-5540-42CD-87C7-4D9B1AFBF41C}"/>
+                <a16:creationId xmlns:a16="http://schemas.microsoft.com/office/drawing/2014/main" id="{8D354C7F-CA94-4187-94C1-4805BDB06C43}"/>
               </a:ext>
             </a:extLst>
           </p:cNvPr>
@@ -5152,20 +4945,12 @@
               </a:defRPr>
             </a:pPr>
             <a:r>
-              <a:rPr sz="1650" b="1" dirty="0" err="1">
-                <a:solidFill>
-                  <a:srgbClr val="111827"/>
-                </a:solidFill>
-              </a:rPr>
-              <a:t>流程</a:t>
-            </a:r>
-            <a:r>
-              <a:rPr sz="1650" b="1" dirty="0">
-                <a:solidFill>
-                  <a:srgbClr val="111827"/>
-                </a:solidFill>
-              </a:rPr>
-              <a:t> A｜SVM</a:t>
+              <a:rPr sz="1650" b="1">
+                <a:solidFill>
+                  <a:srgbClr val="111827"/>
+                </a:solidFill>
+              </a:rPr>
+              <a:t>流程 A｜Direct SVM</a:t>
             </a:r>
           </a:p>
         </p:txBody>
@@ -5175,7 +4960,7 @@
           <p:cNvPr id="16" name="Rectangle 15">
             <a:extLst>
               <a:ext uri="{FF2B5EF4-FFF2-40B4-BE49-F238E27FC236}">
-                <a16:creationId xmlns:a16="http://schemas.microsoft.com/office/drawing/2014/main" id="{95E87E36-BF00-44B8-AAF4-B94E9D477230}"/>
+                <a16:creationId xmlns:a16="http://schemas.microsoft.com/office/drawing/2014/main" id="{288E6B17-2203-407D-A646-B8BEDDA65397}"/>
               </a:ext>
             </a:extLst>
           </p:cNvPr>
@@ -5225,7 +5010,7 @@
           <p:cNvPr id="17" name="Rectangle 16">
             <a:extLst>
               <a:ext uri="{FF2B5EF4-FFF2-40B4-BE49-F238E27FC236}">
-                <a16:creationId xmlns:a16="http://schemas.microsoft.com/office/drawing/2014/main" id="{27A836E2-9D58-4A96-B41C-A6CA2EA1AB59}"/>
+                <a16:creationId xmlns:a16="http://schemas.microsoft.com/office/drawing/2014/main" id="{425C15F2-B03E-44BD-8D6C-DD48B9DA8C93}"/>
               </a:ext>
             </a:extLst>
           </p:cNvPr>
@@ -5263,7 +5048,7 @@
           <p:cNvPr id="18" name="Rectangle 17">
             <a:extLst>
               <a:ext uri="{FF2B5EF4-FFF2-40B4-BE49-F238E27FC236}">
-                <a16:creationId xmlns:a16="http://schemas.microsoft.com/office/drawing/2014/main" id="{E0A554CB-8803-462B-8168-9574B5CE53F9}"/>
+                <a16:creationId xmlns:a16="http://schemas.microsoft.com/office/drawing/2014/main" id="{6F669446-C916-4326-90A3-E3EC2A0FB0FC}"/>
               </a:ext>
             </a:extLst>
           </p:cNvPr>
@@ -5313,7 +5098,7 @@
           <p:cNvPr id="19" name="Rectangle 18">
             <a:extLst>
               <a:ext uri="{FF2B5EF4-FFF2-40B4-BE49-F238E27FC236}">
-                <a16:creationId xmlns:a16="http://schemas.microsoft.com/office/drawing/2014/main" id="{B60B2A8B-84D6-4346-AC02-66BBA395ED6D}"/>
+                <a16:creationId xmlns:a16="http://schemas.microsoft.com/office/drawing/2014/main" id="{BA3F981E-F289-4FBF-836A-0ABB6ABB3679}"/>
               </a:ext>
             </a:extLst>
           </p:cNvPr>
@@ -5363,7 +5148,7 @@
           <p:cNvPr id="20" name="Rectangle 19">
             <a:extLst>
               <a:ext uri="{FF2B5EF4-FFF2-40B4-BE49-F238E27FC236}">
-                <a16:creationId xmlns:a16="http://schemas.microsoft.com/office/drawing/2014/main" id="{2F89CCD3-D9EB-400C-B4C7-D8BBDC3A972D}"/>
+                <a16:creationId xmlns:a16="http://schemas.microsoft.com/office/drawing/2014/main" id="{160F33AF-1F57-4BA7-BC29-F7471CBD1A82}"/>
               </a:ext>
             </a:extLst>
           </p:cNvPr>
@@ -5413,7 +5198,7 @@
           <p:cNvPr id="21" name="Rectangle 20">
             <a:extLst>
               <a:ext uri="{FF2B5EF4-FFF2-40B4-BE49-F238E27FC236}">
-                <a16:creationId xmlns:a16="http://schemas.microsoft.com/office/drawing/2014/main" id="{F16E5E3C-4BCD-4652-9791-413C85776389}"/>
+                <a16:creationId xmlns:a16="http://schemas.microsoft.com/office/drawing/2014/main" id="{66AFEAF0-B163-4F6F-8ECD-0BE71C6A3E02}"/>
               </a:ext>
             </a:extLst>
           </p:cNvPr>
@@ -5463,7 +5248,7 @@
           <p:cNvPr id="22" name="Rectangle 21">
             <a:extLst>
               <a:ext uri="{FF2B5EF4-FFF2-40B4-BE49-F238E27FC236}">
-                <a16:creationId xmlns:a16="http://schemas.microsoft.com/office/drawing/2014/main" id="{90A339A0-A4B6-402D-A815-5E7279E27F43}"/>
+                <a16:creationId xmlns:a16="http://schemas.microsoft.com/office/drawing/2014/main" id="{958D9073-2E40-435E-825D-581FCB101719}"/>
               </a:ext>
             </a:extLst>
           </p:cNvPr>
@@ -5501,7 +5286,7 @@
           <p:cNvPr id="23" name="Rectangle 22">
             <a:extLst>
               <a:ext uri="{FF2B5EF4-FFF2-40B4-BE49-F238E27FC236}">
-                <a16:creationId xmlns:a16="http://schemas.microsoft.com/office/drawing/2014/main" id="{9A28B0E1-E16D-4A35-A205-F585AB2BAC8C}"/>
+                <a16:creationId xmlns:a16="http://schemas.microsoft.com/office/drawing/2014/main" id="{399A9D61-6607-4E9C-B320-77229A124BBB}"/>
               </a:ext>
             </a:extLst>
           </p:cNvPr>
@@ -5551,7 +5336,7 @@
           <p:cNvPr id="24" name="Rectangle 23">
             <a:extLst>
               <a:ext uri="{FF2B5EF4-FFF2-40B4-BE49-F238E27FC236}">
-                <a16:creationId xmlns:a16="http://schemas.microsoft.com/office/drawing/2014/main" id="{39CFE53C-7D90-4F59-AC12-4B877930167E}"/>
+                <a16:creationId xmlns:a16="http://schemas.microsoft.com/office/drawing/2014/main" id="{2DECDE84-937A-44A2-AB03-680F8562E999}"/>
               </a:ext>
             </a:extLst>
           </p:cNvPr>
@@ -5618,7 +5403,7 @@
           <p:cNvPr id="25" name="Rectangle 24">
             <a:extLst>
               <a:ext uri="{FF2B5EF4-FFF2-40B4-BE49-F238E27FC236}">
-                <a16:creationId xmlns:a16="http://schemas.microsoft.com/office/drawing/2014/main" id="{2460756A-A748-4596-99F0-96F262FDA0A8}"/>
+                <a16:creationId xmlns:a16="http://schemas.microsoft.com/office/drawing/2014/main" id="{87AEFAC6-8DE3-493F-8A51-21CA815541EF}"/>
               </a:ext>
             </a:extLst>
           </p:cNvPr>
@@ -5656,7 +5441,7 @@
           <p:cNvPr id="26" name="Rectangle 25">
             <a:extLst>
               <a:ext uri="{FF2B5EF4-FFF2-40B4-BE49-F238E27FC236}">
-                <a16:creationId xmlns:a16="http://schemas.microsoft.com/office/drawing/2014/main" id="{66829180-73C6-424D-8ED2-CE44102D8B3C}"/>
+                <a16:creationId xmlns:a16="http://schemas.microsoft.com/office/drawing/2014/main" id="{B6547CBA-F022-4705-8F20-FF6F0A072110}"/>
               </a:ext>
             </a:extLst>
           </p:cNvPr>
@@ -5706,7 +5491,7 @@
           <p:cNvPr id="27" name="Rectangle 26">
             <a:extLst>
               <a:ext uri="{FF2B5EF4-FFF2-40B4-BE49-F238E27FC236}">
-                <a16:creationId xmlns:a16="http://schemas.microsoft.com/office/drawing/2014/main" id="{EF4B74C3-EA81-4E04-B6C8-4DC5F2D23B28}"/>
+                <a16:creationId xmlns:a16="http://schemas.microsoft.com/office/drawing/2014/main" id="{8B7F238C-556E-47A2-8DF7-FE1C221C5D1D}"/>
               </a:ext>
             </a:extLst>
           </p:cNvPr>
@@ -5756,7 +5541,7 @@
           <p:cNvPr id="28" name="Rectangle 27">
             <a:extLst>
               <a:ext uri="{FF2B5EF4-FFF2-40B4-BE49-F238E27FC236}">
-                <a16:creationId xmlns:a16="http://schemas.microsoft.com/office/drawing/2014/main" id="{A9848707-E4B0-4501-A2C5-0CF137542DE2}"/>
+                <a16:creationId xmlns:a16="http://schemas.microsoft.com/office/drawing/2014/main" id="{DC600352-8310-4F6D-A2D5-65EE95E3D372}"/>
               </a:ext>
             </a:extLst>
           </p:cNvPr>
@@ -5794,7 +5579,7 @@
           <p:cNvPr id="29" name="Rectangle 28">
             <a:extLst>
               <a:ext uri="{FF2B5EF4-FFF2-40B4-BE49-F238E27FC236}">
-                <a16:creationId xmlns:a16="http://schemas.microsoft.com/office/drawing/2014/main" id="{C975C8DE-93BB-400A-A7B1-C5EA3FF94202}"/>
+                <a16:creationId xmlns:a16="http://schemas.microsoft.com/office/drawing/2014/main" id="{4EB59A77-2E33-4AC0-92A5-F7EA878182E6}"/>
               </a:ext>
             </a:extLst>
           </p:cNvPr>
@@ -5844,7 +5629,7 @@
           <p:cNvPr id="30" name="Rectangle 29">
             <a:extLst>
               <a:ext uri="{FF2B5EF4-FFF2-40B4-BE49-F238E27FC236}">
-                <a16:creationId xmlns:a16="http://schemas.microsoft.com/office/drawing/2014/main" id="{727904A1-84BD-4006-A2BA-19D615877A95}"/>
+                <a16:creationId xmlns:a16="http://schemas.microsoft.com/office/drawing/2014/main" id="{DADFF225-8211-47CF-B1C5-9ACC51AB3AD4}"/>
               </a:ext>
             </a:extLst>
           </p:cNvPr>
@@ -5894,7 +5679,7 @@
           <p:cNvPr id="31" name="Rectangle 30">
             <a:extLst>
               <a:ext uri="{FF2B5EF4-FFF2-40B4-BE49-F238E27FC236}">
-                <a16:creationId xmlns:a16="http://schemas.microsoft.com/office/drawing/2014/main" id="{BB15F9C0-78B4-436F-85BD-8D44CE554454}"/>
+                <a16:creationId xmlns:a16="http://schemas.microsoft.com/office/drawing/2014/main" id="{66712F9C-DE68-4794-B63B-E83D40E3BCF7}"/>
               </a:ext>
             </a:extLst>
           </p:cNvPr>
@@ -5944,57 +5729,7 @@
           <p:cNvPr id="32" name="Rectangle 31">
             <a:extLst>
               <a:ext uri="{FF2B5EF4-FFF2-40B4-BE49-F238E27FC236}">
-                <a16:creationId xmlns:a16="http://schemas.microsoft.com/office/drawing/2014/main" id="{8DF12961-772E-4EBF-8C2A-75CFB01C69C1}"/>
-              </a:ext>
-            </a:extLst>
-          </p:cNvPr>
-          <p:cNvSpPr>
-            <a:spLocks noGrp="1"/>
-          </p:cNvSpPr>
-          <p:nvPr/>
-        </p:nvSpPr>
-        <p:spPr>
-          <a:xfrm>
-            <a:off x="685800" y="6457950"/>
-            <a:ext cx="3333750" cy="152400"/>
-          </a:xfrm>
-          <a:prstGeom prst="rect">
-            <a:avLst/>
-          </a:prstGeom>
-          <a:noFill/>
-          <a:ln w="0">
-            <a:noFill/>
-            <a:prstDash val="solid"/>
-          </a:ln>
-        </p:spPr>
-        <p:txBody>
-          <a:bodyPr anchor="ctr"/>
-          <a:lstStyle/>
-          <a:p>
-            <a:pPr>
-              <a:defRPr sz="825" b="0">
-                <a:solidFill>
-                  <a:srgbClr val="5D6775"/>
-                </a:solidFill>
-              </a:defRPr>
-            </a:pPr>
-            <a:r>
-              <a:rPr sz="825" b="0">
-                <a:solidFill>
-                  <a:srgbClr val="5D6775"/>
-                </a:solidFill>
-              </a:rPr>
-              <a:t>崇越論文大賞決賽  |  M0263</a:t>
-            </a:r>
-          </a:p>
-        </p:txBody>
-      </p:sp>
-      <p:sp>
-        <p:nvSpPr>
-          <p:cNvPr id="33" name="Rectangle 32">
-            <a:extLst>
-              <a:ext uri="{FF2B5EF4-FFF2-40B4-BE49-F238E27FC236}">
-                <a16:creationId xmlns:a16="http://schemas.microsoft.com/office/drawing/2014/main" id="{4C2A2012-36BB-46CD-9644-5AEF7AB8FF30}"/>
+                <a16:creationId xmlns:a16="http://schemas.microsoft.com/office/drawing/2014/main" id="{C9724653-1F52-495D-B015-C3366BA6E2C8}"/>
               </a:ext>
             </a:extLst>
           </p:cNvPr>
@@ -6042,7 +5777,7 @@
     </p:spTree>
     <p:extLst>
       <p:ext uri="{BB962C8B-B14F-4D97-AF65-F5344CB8AC3E}">
-        <p14:creationId xmlns:p14="http://schemas.microsoft.com/office/powerpoint/2010/main" val="715866264"/>
+        <p14:creationId xmlns:p14="http://schemas.microsoft.com/office/powerpoint/2010/main" val="252362318"/>
       </p:ext>
     </p:extLst>
   </p:cSld>
@@ -6079,10 +5814,10 @@
       </p:grpSpPr>
       <p:sp>
         <p:nvSpPr>
-          <p:cNvPr id="14" name="Rectangle 13">
-            <a:extLst>
-              <a:ext uri="{FF2B5EF4-FFF2-40B4-BE49-F238E27FC236}">
-                <a16:creationId xmlns:a16="http://schemas.microsoft.com/office/drawing/2014/main" id="{72F81596-6DD7-4DB1-9308-3FF8F5175B2F}"/>
+          <p:cNvPr id="13" name="Rectangle 12">
+            <a:extLst>
+              <a:ext uri="{FF2B5EF4-FFF2-40B4-BE49-F238E27FC236}">
+                <a16:creationId xmlns:a16="http://schemas.microsoft.com/office/drawing/2014/main" id="{A527DADE-599A-413D-925B-7C0C2DD93137}"/>
               </a:ext>
             </a:extLst>
           </p:cNvPr>
@@ -6132,7 +5867,7 @@
           <p:cNvPr id="2" name="title">
             <a:extLst>
               <a:ext uri="{FF2B5EF4-FFF2-40B4-BE49-F238E27FC236}">
-                <a16:creationId xmlns:a16="http://schemas.microsoft.com/office/drawing/2014/main" id="{2AC8F164-19ED-4227-B1F9-062631B581E5}"/>
+                <a16:creationId xmlns:a16="http://schemas.microsoft.com/office/drawing/2014/main" id="{A2944A93-2D04-4D5E-B548-D310398133BF}"/>
               </a:ext>
             </a:extLst>
           </p:cNvPr>
@@ -6182,7 +5917,7 @@
           <p:cNvPr id="3" name="Rectangle 2">
             <a:extLst>
               <a:ext uri="{FF2B5EF4-FFF2-40B4-BE49-F238E27FC236}">
-                <a16:creationId xmlns:a16="http://schemas.microsoft.com/office/drawing/2014/main" id="{EDD970DA-04BE-4729-A131-84D8C3D8598A}"/>
+                <a16:creationId xmlns:a16="http://schemas.microsoft.com/office/drawing/2014/main" id="{D98A6CA0-AF4B-4460-A6D1-5ABD8BC305BD}"/>
               </a:ext>
             </a:extLst>
           </p:cNvPr>
@@ -6232,7 +5967,7 @@
           <p:cNvPr id="4" name="Rectangle 3">
             <a:extLst>
               <a:ext uri="{FF2B5EF4-FFF2-40B4-BE49-F238E27FC236}">
-                <a16:creationId xmlns:a16="http://schemas.microsoft.com/office/drawing/2014/main" id="{C3F9D312-A7D8-4A30-A4FF-6BC137D0B205}"/>
+                <a16:creationId xmlns:a16="http://schemas.microsoft.com/office/drawing/2014/main" id="{684A7E4C-E7AB-4778-933C-2B7D949FF607}"/>
               </a:ext>
             </a:extLst>
           </p:cNvPr>
@@ -6267,12 +6002,12 @@
       </p:sp>
       <p:graphicFrame>
         <p:nvGraphicFramePr>
-          <p:cNvPr id="18" name="Chart"/>
+          <p:cNvPr id="17" name="Chart"/>
           <p:cNvGraphicFramePr/>
           <p:nvPr>
             <p:extLst>
               <p:ext uri="{D42A27DB-BD31-4B8C-83A1-F6EECF244321}">
-                <p14:modId xmlns:p14="http://schemas.microsoft.com/office/powerpoint/2010/main" val="446583214"/>
+                <p14:modId xmlns:p14="http://schemas.microsoft.com/office/powerpoint/2010/main" val="1726053343"/>
               </p:ext>
             </p:extLst>
           </p:nvPr>
@@ -6292,7 +6027,7 @@
           <p:cNvPr id="6" name="Rectangle 5">
             <a:extLst>
               <a:ext uri="{FF2B5EF4-FFF2-40B4-BE49-F238E27FC236}">
-                <a16:creationId xmlns:a16="http://schemas.microsoft.com/office/drawing/2014/main" id="{6764AADA-04D7-406A-B441-4CDD91D964D0}"/>
+                <a16:creationId xmlns:a16="http://schemas.microsoft.com/office/drawing/2014/main" id="{1535F737-FAD4-446C-B074-778214976C96}"/>
               </a:ext>
             </a:extLst>
           </p:cNvPr>
@@ -6330,7 +6065,7 @@
           <p:cNvPr id="7" name="Rectangle 6">
             <a:extLst>
               <a:ext uri="{FF2B5EF4-FFF2-40B4-BE49-F238E27FC236}">
-                <a16:creationId xmlns:a16="http://schemas.microsoft.com/office/drawing/2014/main" id="{02BFC3FF-BDD6-4F18-A6D8-403B21BBBCC5}"/>
+                <a16:creationId xmlns:a16="http://schemas.microsoft.com/office/drawing/2014/main" id="{7C964967-6912-45A7-8184-CB05ACCBAC9A}"/>
               </a:ext>
             </a:extLst>
           </p:cNvPr>
@@ -6380,7 +6115,7 @@
           <p:cNvPr id="8" name="Rectangle 7">
             <a:extLst>
               <a:ext uri="{FF2B5EF4-FFF2-40B4-BE49-F238E27FC236}">
-                <a16:creationId xmlns:a16="http://schemas.microsoft.com/office/drawing/2014/main" id="{E92EA564-315B-4DA2-8D9E-68873AD70270}"/>
+                <a16:creationId xmlns:a16="http://schemas.microsoft.com/office/drawing/2014/main" id="{47DFC6CE-A8B2-4262-8475-D5CC7439F1C4}"/>
               </a:ext>
             </a:extLst>
           </p:cNvPr>
@@ -6464,7 +6199,7 @@
           <p:cNvPr id="9" name="Rectangle 8">
             <a:extLst>
               <a:ext uri="{FF2B5EF4-FFF2-40B4-BE49-F238E27FC236}">
-                <a16:creationId xmlns:a16="http://schemas.microsoft.com/office/drawing/2014/main" id="{671D4A6B-79A2-4A64-BF39-A734AC8D15F1}"/>
+                <a16:creationId xmlns:a16="http://schemas.microsoft.com/office/drawing/2014/main" id="{10D2EE8A-FAB3-46FC-9497-EBAB0446DC2F}"/>
               </a:ext>
             </a:extLst>
           </p:cNvPr>
@@ -6502,7 +6237,7 @@
           <p:cNvPr id="10" name="Rectangle 9">
             <a:extLst>
               <a:ext uri="{FF2B5EF4-FFF2-40B4-BE49-F238E27FC236}">
-                <a16:creationId xmlns:a16="http://schemas.microsoft.com/office/drawing/2014/main" id="{82B6D093-3D87-486A-9DC2-A530B4D995B1}"/>
+                <a16:creationId xmlns:a16="http://schemas.microsoft.com/office/drawing/2014/main" id="{5E57FB16-80E1-47FB-9444-6039CA411348}"/>
               </a:ext>
             </a:extLst>
           </p:cNvPr>
@@ -6552,7 +6287,7 @@
           <p:cNvPr id="11" name="Rectangle 10">
             <a:extLst>
               <a:ext uri="{FF2B5EF4-FFF2-40B4-BE49-F238E27FC236}">
-                <a16:creationId xmlns:a16="http://schemas.microsoft.com/office/drawing/2014/main" id="{157E6EF0-1E4E-41B4-8584-5879F0FEAF7C}"/>
+                <a16:creationId xmlns:a16="http://schemas.microsoft.com/office/drawing/2014/main" id="{3B1A3B7B-EE89-4E5C-B672-FFDCD918C4FD}"/>
               </a:ext>
             </a:extLst>
           </p:cNvPr>
@@ -6636,57 +6371,7 @@
           <p:cNvPr id="12" name="Rectangle 11">
             <a:extLst>
               <a:ext uri="{FF2B5EF4-FFF2-40B4-BE49-F238E27FC236}">
-                <a16:creationId xmlns:a16="http://schemas.microsoft.com/office/drawing/2014/main" id="{A907AF69-192B-41B3-B3A3-0684C7CFB477}"/>
-              </a:ext>
-            </a:extLst>
-          </p:cNvPr>
-          <p:cNvSpPr>
-            <a:spLocks noGrp="1"/>
-          </p:cNvSpPr>
-          <p:nvPr/>
-        </p:nvSpPr>
-        <p:spPr>
-          <a:xfrm>
-            <a:off x="685800" y="6457950"/>
-            <a:ext cx="3333750" cy="152400"/>
-          </a:xfrm>
-          <a:prstGeom prst="rect">
-            <a:avLst/>
-          </a:prstGeom>
-          <a:noFill/>
-          <a:ln w="0">
-            <a:noFill/>
-            <a:prstDash val="solid"/>
-          </a:ln>
-        </p:spPr>
-        <p:txBody>
-          <a:bodyPr anchor="ctr"/>
-          <a:lstStyle/>
-          <a:p>
-            <a:pPr>
-              <a:defRPr sz="825" b="0">
-                <a:solidFill>
-                  <a:srgbClr val="5D6775"/>
-                </a:solidFill>
-              </a:defRPr>
-            </a:pPr>
-            <a:r>
-              <a:rPr sz="825" b="0">
-                <a:solidFill>
-                  <a:srgbClr val="5D6775"/>
-                </a:solidFill>
-              </a:rPr>
-              <a:t>崇越論文大賞決賽  |  M0263</a:t>
-            </a:r>
-          </a:p>
-        </p:txBody>
-      </p:sp>
-      <p:sp>
-        <p:nvSpPr>
-          <p:cNvPr id="13" name="Rectangle 12">
-            <a:extLst>
-              <a:ext uri="{FF2B5EF4-FFF2-40B4-BE49-F238E27FC236}">
-                <a16:creationId xmlns:a16="http://schemas.microsoft.com/office/drawing/2014/main" id="{BF665870-14B3-431F-AE44-5C7BBCA65351}"/>
+                <a16:creationId xmlns:a16="http://schemas.microsoft.com/office/drawing/2014/main" id="{D4E2E816-A6AE-4AC3-A1BC-8D8E533E0835}"/>
               </a:ext>
             </a:extLst>
           </p:cNvPr>
@@ -6734,7 +6419,7 @@
     </p:spTree>
     <p:extLst>
       <p:ext uri="{BB962C8B-B14F-4D97-AF65-F5344CB8AC3E}">
-        <p14:creationId xmlns:p14="http://schemas.microsoft.com/office/powerpoint/2010/main" val="1798069964"/>
+        <p14:creationId xmlns:p14="http://schemas.microsoft.com/office/powerpoint/2010/main" val="1883329812"/>
       </p:ext>
     </p:extLst>
   </p:cSld>
@@ -6771,10 +6456,10 @@
       </p:grpSpPr>
       <p:sp>
         <p:nvSpPr>
-          <p:cNvPr id="26" name="Rectangle 25">
-            <a:extLst>
-              <a:ext uri="{FF2B5EF4-FFF2-40B4-BE49-F238E27FC236}">
-                <a16:creationId xmlns:a16="http://schemas.microsoft.com/office/drawing/2014/main" id="{7F5ADB47-D6C6-4120-A1FE-96720ADB750B}"/>
+          <p:cNvPr id="25" name="Rectangle 24">
+            <a:extLst>
+              <a:ext uri="{FF2B5EF4-FFF2-40B4-BE49-F238E27FC236}">
+                <a16:creationId xmlns:a16="http://schemas.microsoft.com/office/drawing/2014/main" id="{A2034D91-79A1-42A0-AFF4-CC812F127331}"/>
               </a:ext>
             </a:extLst>
           </p:cNvPr>
@@ -6824,7 +6509,7 @@
           <p:cNvPr id="2" name="title">
             <a:extLst>
               <a:ext uri="{FF2B5EF4-FFF2-40B4-BE49-F238E27FC236}">
-                <a16:creationId xmlns:a16="http://schemas.microsoft.com/office/drawing/2014/main" id="{508CBD07-114C-40AF-95BD-5DF3E3385779}"/>
+                <a16:creationId xmlns:a16="http://schemas.microsoft.com/office/drawing/2014/main" id="{7B695010-B125-44EE-B86C-BEEDACE0ED4E}"/>
               </a:ext>
             </a:extLst>
           </p:cNvPr>
@@ -6874,7 +6559,7 @@
           <p:cNvPr id="3" name="Rectangle 2">
             <a:extLst>
               <a:ext uri="{FF2B5EF4-FFF2-40B4-BE49-F238E27FC236}">
-                <a16:creationId xmlns:a16="http://schemas.microsoft.com/office/drawing/2014/main" id="{4BCDC8CD-82F2-4E88-97B7-3BD7F24472D0}"/>
+                <a16:creationId xmlns:a16="http://schemas.microsoft.com/office/drawing/2014/main" id="{F7CB8892-F607-4F2F-B028-B6913F58C2A2}"/>
               </a:ext>
             </a:extLst>
           </p:cNvPr>
@@ -6924,7 +6609,7 @@
           <p:cNvPr id="4" name="Rectangle 3">
             <a:extLst>
               <a:ext uri="{FF2B5EF4-FFF2-40B4-BE49-F238E27FC236}">
-                <a16:creationId xmlns:a16="http://schemas.microsoft.com/office/drawing/2014/main" id="{B6EF0CAF-728F-4D3B-916A-A97A082BE59A}"/>
+                <a16:creationId xmlns:a16="http://schemas.microsoft.com/office/drawing/2014/main" id="{5B069C3B-659F-40B2-A801-62BE685C50AE}"/>
               </a:ext>
             </a:extLst>
           </p:cNvPr>
@@ -6962,7 +6647,7 @@
           <p:cNvPr id="5" name="Rectangle 4">
             <a:extLst>
               <a:ext uri="{FF2B5EF4-FFF2-40B4-BE49-F238E27FC236}">
-                <a16:creationId xmlns:a16="http://schemas.microsoft.com/office/drawing/2014/main" id="{0345EB33-6307-4C7A-BD46-0E0FA2E2E92A}"/>
+                <a16:creationId xmlns:a16="http://schemas.microsoft.com/office/drawing/2014/main" id="{614B1A3F-2E7A-43C3-8B2C-537E933A8C14}"/>
               </a:ext>
             </a:extLst>
           </p:cNvPr>
@@ -7012,7 +6697,7 @@
           <p:cNvPr id="6" name="Rectangle 5">
             <a:extLst>
               <a:ext uri="{FF2B5EF4-FFF2-40B4-BE49-F238E27FC236}">
-                <a16:creationId xmlns:a16="http://schemas.microsoft.com/office/drawing/2014/main" id="{A5C6AE5E-9BA8-4970-B6AE-64444F6ABDC2}"/>
+                <a16:creationId xmlns:a16="http://schemas.microsoft.com/office/drawing/2014/main" id="{ABDCB370-3C16-413C-96A3-CFEA8135E5B3}"/>
               </a:ext>
             </a:extLst>
           </p:cNvPr>
@@ -7062,7 +6747,7 @@
           <p:cNvPr id="7" name="Rectangle 6">
             <a:extLst>
               <a:ext uri="{FF2B5EF4-FFF2-40B4-BE49-F238E27FC236}">
-                <a16:creationId xmlns:a16="http://schemas.microsoft.com/office/drawing/2014/main" id="{99DC0742-5B57-45CF-9C6D-05CE2F392869}"/>
+                <a16:creationId xmlns:a16="http://schemas.microsoft.com/office/drawing/2014/main" id="{0E1004CB-A8F9-44C7-A8A4-0931B0AE0E2C}"/>
               </a:ext>
             </a:extLst>
           </p:cNvPr>
@@ -7100,7 +6785,7 @@
           <p:cNvPr id="8" name="Rectangle 7">
             <a:extLst>
               <a:ext uri="{FF2B5EF4-FFF2-40B4-BE49-F238E27FC236}">
-                <a16:creationId xmlns:a16="http://schemas.microsoft.com/office/drawing/2014/main" id="{56CF9DE7-5181-4238-88B0-67F2FC553822}"/>
+                <a16:creationId xmlns:a16="http://schemas.microsoft.com/office/drawing/2014/main" id="{B84A6252-915B-43A4-952E-1558513D13C7}"/>
               </a:ext>
             </a:extLst>
           </p:cNvPr>
@@ -7150,7 +6835,7 @@
           <p:cNvPr id="9" name="Rectangle 8">
             <a:extLst>
               <a:ext uri="{FF2B5EF4-FFF2-40B4-BE49-F238E27FC236}">
-                <a16:creationId xmlns:a16="http://schemas.microsoft.com/office/drawing/2014/main" id="{1D94E385-9BCF-47E1-B526-2A50A67B1894}"/>
+                <a16:creationId xmlns:a16="http://schemas.microsoft.com/office/drawing/2014/main" id="{2B7E3A05-3602-4D49-97DE-B8AD7312E2EC}"/>
               </a:ext>
             </a:extLst>
           </p:cNvPr>
@@ -7200,7 +6885,7 @@
           <p:cNvPr id="10" name="Rectangle 9">
             <a:extLst>
               <a:ext uri="{FF2B5EF4-FFF2-40B4-BE49-F238E27FC236}">
-                <a16:creationId xmlns:a16="http://schemas.microsoft.com/office/drawing/2014/main" id="{6CC98DA5-09B5-45B9-8F5A-F25DC023D519}"/>
+                <a16:creationId xmlns:a16="http://schemas.microsoft.com/office/drawing/2014/main" id="{DEFFE606-D714-45B5-984C-543DA7CFE6E6}"/>
               </a:ext>
             </a:extLst>
           </p:cNvPr>
@@ -7238,7 +6923,7 @@
           <p:cNvPr id="11" name="Rectangle 10">
             <a:extLst>
               <a:ext uri="{FF2B5EF4-FFF2-40B4-BE49-F238E27FC236}">
-                <a16:creationId xmlns:a16="http://schemas.microsoft.com/office/drawing/2014/main" id="{C26D2B10-0601-476E-A4CA-561BBBE49EA1}"/>
+                <a16:creationId xmlns:a16="http://schemas.microsoft.com/office/drawing/2014/main" id="{676BCF6D-B09E-4734-AF61-D1622872D2AA}"/>
               </a:ext>
             </a:extLst>
           </p:cNvPr>
@@ -7288,7 +6973,7 @@
           <p:cNvPr id="12" name="Rectangle 11">
             <a:extLst>
               <a:ext uri="{FF2B5EF4-FFF2-40B4-BE49-F238E27FC236}">
-                <a16:creationId xmlns:a16="http://schemas.microsoft.com/office/drawing/2014/main" id="{3283BC09-E46A-4F7D-A3BF-D4EC77F4FC07}"/>
+                <a16:creationId xmlns:a16="http://schemas.microsoft.com/office/drawing/2014/main" id="{B1EC7303-36FC-4F06-AC9E-E5B4997B97B7}"/>
               </a:ext>
             </a:extLst>
           </p:cNvPr>
@@ -7338,7 +7023,7 @@
           <p:cNvPr id="13" name="Rectangle 12">
             <a:extLst>
               <a:ext uri="{FF2B5EF4-FFF2-40B4-BE49-F238E27FC236}">
-                <a16:creationId xmlns:a16="http://schemas.microsoft.com/office/drawing/2014/main" id="{B2F1734D-1693-4B23-897A-F81BFD12422C}"/>
+                <a16:creationId xmlns:a16="http://schemas.microsoft.com/office/drawing/2014/main" id="{F0B2C011-ABD0-4A82-9B53-C12BB4CBB5FC}"/>
               </a:ext>
             </a:extLst>
           </p:cNvPr>
@@ -7376,7 +7061,7 @@
           <p:cNvPr id="14" name="Rectangle 13">
             <a:extLst>
               <a:ext uri="{FF2B5EF4-FFF2-40B4-BE49-F238E27FC236}">
-                <a16:creationId xmlns:a16="http://schemas.microsoft.com/office/drawing/2014/main" id="{2FBF1111-0AF2-4C9B-A4F4-9E1D09239882}"/>
+                <a16:creationId xmlns:a16="http://schemas.microsoft.com/office/drawing/2014/main" id="{822B1E9E-ABA8-49BA-9DD7-4F814E6699FB}"/>
               </a:ext>
             </a:extLst>
           </p:cNvPr>
@@ -7426,7 +7111,7 @@
           <p:cNvPr id="15" name="Rectangle 14">
             <a:extLst>
               <a:ext uri="{FF2B5EF4-FFF2-40B4-BE49-F238E27FC236}">
-                <a16:creationId xmlns:a16="http://schemas.microsoft.com/office/drawing/2014/main" id="{D7005067-4A46-4233-B9AD-A6DB263E1987}"/>
+                <a16:creationId xmlns:a16="http://schemas.microsoft.com/office/drawing/2014/main" id="{C5303C8C-7141-4EBD-BC39-A7A2F99F5DA1}"/>
               </a:ext>
             </a:extLst>
           </p:cNvPr>
@@ -7476,7 +7161,7 @@
           <p:cNvPr id="16" name="Rectangle 15">
             <a:extLst>
               <a:ext uri="{FF2B5EF4-FFF2-40B4-BE49-F238E27FC236}">
-                <a16:creationId xmlns:a16="http://schemas.microsoft.com/office/drawing/2014/main" id="{5672FB0E-1AB6-4D1E-A625-0004CA519873}"/>
+                <a16:creationId xmlns:a16="http://schemas.microsoft.com/office/drawing/2014/main" id="{821A3B88-6F43-4381-BB2E-5D09A4F8ABE4}"/>
               </a:ext>
             </a:extLst>
           </p:cNvPr>
@@ -7514,7 +7199,7 @@
           <p:cNvPr id="17" name="Rectangle 16">
             <a:extLst>
               <a:ext uri="{FF2B5EF4-FFF2-40B4-BE49-F238E27FC236}">
-                <a16:creationId xmlns:a16="http://schemas.microsoft.com/office/drawing/2014/main" id="{E4D7028F-51BB-4B03-B653-E2025BE65826}"/>
+                <a16:creationId xmlns:a16="http://schemas.microsoft.com/office/drawing/2014/main" id="{EDE22F43-7696-4E68-A0C9-7C21381A9CC7}"/>
               </a:ext>
             </a:extLst>
           </p:cNvPr>
@@ -7564,7 +7249,7 @@
           <p:cNvPr id="18" name="Rectangle 17">
             <a:extLst>
               <a:ext uri="{FF2B5EF4-FFF2-40B4-BE49-F238E27FC236}">
-                <a16:creationId xmlns:a16="http://schemas.microsoft.com/office/drawing/2014/main" id="{5C075AF8-2962-4D9C-9D5A-86FAB6B066EC}"/>
+                <a16:creationId xmlns:a16="http://schemas.microsoft.com/office/drawing/2014/main" id="{EF2FD081-FB9A-4B25-BB2A-A2F925E58DB5}"/>
               </a:ext>
             </a:extLst>
           </p:cNvPr>
@@ -7614,7 +7299,7 @@
           <p:cNvPr id="19" name="Rectangle 18">
             <a:extLst>
               <a:ext uri="{FF2B5EF4-FFF2-40B4-BE49-F238E27FC236}">
-                <a16:creationId xmlns:a16="http://schemas.microsoft.com/office/drawing/2014/main" id="{2CAF9FC0-9DEB-46FE-9FFF-52A1C3639F9F}"/>
+                <a16:creationId xmlns:a16="http://schemas.microsoft.com/office/drawing/2014/main" id="{ABCD07CD-094C-4B92-9AE6-372568055BB6}"/>
               </a:ext>
             </a:extLst>
           </p:cNvPr>
@@ -7652,7 +7337,7 @@
           <p:cNvPr id="20" name="Rectangle 19">
             <a:extLst>
               <a:ext uri="{FF2B5EF4-FFF2-40B4-BE49-F238E27FC236}">
-                <a16:creationId xmlns:a16="http://schemas.microsoft.com/office/drawing/2014/main" id="{D286DFBD-AFA1-47EE-838F-91E85561FD9C}"/>
+                <a16:creationId xmlns:a16="http://schemas.microsoft.com/office/drawing/2014/main" id="{D43C5587-892B-4854-BD96-AB031E63217E}"/>
               </a:ext>
             </a:extLst>
           </p:cNvPr>
@@ -7690,19 +7375,19 @@
           <p:cNvPr id="21" name="Rectangle 20">
             <a:extLst>
               <a:ext uri="{FF2B5EF4-FFF2-40B4-BE49-F238E27FC236}">
-                <a16:creationId xmlns:a16="http://schemas.microsoft.com/office/drawing/2014/main" id="{0039007D-9224-4C87-98E1-60C1D55F28E0}"/>
-              </a:ext>
-            </a:extLst>
-          </p:cNvPr>
-          <p:cNvSpPr>
-            <a:spLocks noGrp="1"/>
-          </p:cNvSpPr>
-          <p:nvPr/>
-        </p:nvSpPr>
-        <p:spPr>
-          <a:xfrm>
-            <a:off x="9324975" y="2724150"/>
-            <a:ext cx="1352550" cy="1066800"/>
+                <a16:creationId xmlns:a16="http://schemas.microsoft.com/office/drawing/2014/main" id="{772B07F5-D529-457F-9383-B45425854964}"/>
+              </a:ext>
+            </a:extLst>
+          </p:cNvPr>
+          <p:cNvSpPr>
+            <a:spLocks noGrp="1"/>
+          </p:cNvSpPr>
+          <p:nvPr/>
+        </p:nvSpPr>
+        <p:spPr>
+          <a:xfrm>
+            <a:off x="9153525" y="2752725"/>
+            <a:ext cx="1695450" cy="1066800"/>
           </a:xfrm>
           <a:prstGeom prst="rect">
             <a:avLst/>
@@ -7730,7 +7415,7 @@
                   <a:srgbClr val="111827"/>
                 </a:solidFill>
               </a:rPr>
-              <a:t>法律問題</a:t>
+              <a:t>法律問題本來就不同</a:t>
             </a:r>
             <a:endParaRPr sz="2250" b="1" dirty="0">
               <a:solidFill>
@@ -7738,50 +7423,6 @@
               </a:solidFill>
             </a:endParaRPr>
           </a:p>
-          <a:p>
-            <a:pPr>
-              <a:defRPr sz="2250" b="1">
-                <a:solidFill>
-                  <a:srgbClr val="111827"/>
-                </a:solidFill>
-              </a:defRPr>
-            </a:pPr>
-            <a:r>
-              <a:rPr sz="2250" b="1" dirty="0" err="1">
-                <a:solidFill>
-                  <a:srgbClr val="111827"/>
-                </a:solidFill>
-              </a:rPr>
-              <a:t>本來就</a:t>
-            </a:r>
-            <a:endParaRPr sz="2250" b="1" dirty="0">
-              <a:solidFill>
-                <a:srgbClr val="111827"/>
-              </a:solidFill>
-            </a:endParaRPr>
-          </a:p>
-          <a:p>
-            <a:pPr>
-              <a:defRPr sz="2250" b="1">
-                <a:solidFill>
-                  <a:srgbClr val="111827"/>
-                </a:solidFill>
-              </a:defRPr>
-            </a:pPr>
-            <a:r>
-              <a:rPr sz="2250" b="1" dirty="0" err="1">
-                <a:solidFill>
-                  <a:srgbClr val="111827"/>
-                </a:solidFill>
-              </a:rPr>
-              <a:t>不同</a:t>
-            </a:r>
-            <a:endParaRPr sz="2250" b="1" dirty="0">
-              <a:solidFill>
-                <a:srgbClr val="111827"/>
-              </a:solidFill>
-            </a:endParaRPr>
-          </a:p>
         </p:txBody>
       </p:sp>
       <p:sp>
@@ -7789,18 +7430,18 @@
           <p:cNvPr id="22" name="Rectangle 21">
             <a:extLst>
               <a:ext uri="{FF2B5EF4-FFF2-40B4-BE49-F238E27FC236}">
-                <a16:creationId xmlns:a16="http://schemas.microsoft.com/office/drawing/2014/main" id="{7477DB39-E4BB-4ABD-82A5-9BD82F14AEA3}"/>
-              </a:ext>
-            </a:extLst>
-          </p:cNvPr>
-          <p:cNvSpPr>
-            <a:spLocks noGrp="1"/>
-          </p:cNvSpPr>
-          <p:nvPr/>
-        </p:nvSpPr>
-        <p:spPr>
-          <a:xfrm>
-            <a:off x="9248775" y="4381500"/>
+                <a16:creationId xmlns:a16="http://schemas.microsoft.com/office/drawing/2014/main" id="{F10F8F95-B782-47A5-9846-7B4DCD75C62D}"/>
+              </a:ext>
+            </a:extLst>
+          </p:cNvPr>
+          <p:cNvSpPr>
+            <a:spLocks noGrp="1"/>
+          </p:cNvSpPr>
+          <p:nvPr/>
+        </p:nvSpPr>
+        <p:spPr>
+          <a:xfrm>
+            <a:off x="9242794" y="4395787"/>
             <a:ext cx="1504950" cy="685800"/>
           </a:xfrm>
           <a:prstGeom prst="rect">
@@ -7866,7 +7507,7 @@
           <p:cNvPr id="23" name="Rectangle 22">
             <a:extLst>
               <a:ext uri="{FF2B5EF4-FFF2-40B4-BE49-F238E27FC236}">
-                <a16:creationId xmlns:a16="http://schemas.microsoft.com/office/drawing/2014/main" id="{E2A75D44-43CD-47CE-9D6A-6876B3264D89}"/>
+                <a16:creationId xmlns:a16="http://schemas.microsoft.com/office/drawing/2014/main" id="{E5840F4E-0488-4B5A-9308-A7644BD2DB58}"/>
               </a:ext>
             </a:extLst>
           </p:cNvPr>
@@ -7916,57 +7557,7 @@
           <p:cNvPr id="24" name="Rectangle 23">
             <a:extLst>
               <a:ext uri="{FF2B5EF4-FFF2-40B4-BE49-F238E27FC236}">
-                <a16:creationId xmlns:a16="http://schemas.microsoft.com/office/drawing/2014/main" id="{71409499-5FEB-4473-9C31-FDF7D07B071F}"/>
-              </a:ext>
-            </a:extLst>
-          </p:cNvPr>
-          <p:cNvSpPr>
-            <a:spLocks noGrp="1"/>
-          </p:cNvSpPr>
-          <p:nvPr/>
-        </p:nvSpPr>
-        <p:spPr>
-          <a:xfrm>
-            <a:off x="685800" y="6457950"/>
-            <a:ext cx="3333750" cy="152400"/>
-          </a:xfrm>
-          <a:prstGeom prst="rect">
-            <a:avLst/>
-          </a:prstGeom>
-          <a:noFill/>
-          <a:ln w="0">
-            <a:noFill/>
-            <a:prstDash val="solid"/>
-          </a:ln>
-        </p:spPr>
-        <p:txBody>
-          <a:bodyPr anchor="ctr"/>
-          <a:lstStyle/>
-          <a:p>
-            <a:pPr>
-              <a:defRPr sz="825" b="0">
-                <a:solidFill>
-                  <a:srgbClr val="5D6775"/>
-                </a:solidFill>
-              </a:defRPr>
-            </a:pPr>
-            <a:r>
-              <a:rPr sz="825" b="0">
-                <a:solidFill>
-                  <a:srgbClr val="5D6775"/>
-                </a:solidFill>
-              </a:rPr>
-              <a:t>崇越論文大賞決賽  |  M0263</a:t>
-            </a:r>
-          </a:p>
-        </p:txBody>
-      </p:sp>
-      <p:sp>
-        <p:nvSpPr>
-          <p:cNvPr id="25" name="Rectangle 24">
-            <a:extLst>
-              <a:ext uri="{FF2B5EF4-FFF2-40B4-BE49-F238E27FC236}">
-                <a16:creationId xmlns:a16="http://schemas.microsoft.com/office/drawing/2014/main" id="{7804C1F8-532D-43F8-9C19-83C4972985A3}"/>
+                <a16:creationId xmlns:a16="http://schemas.microsoft.com/office/drawing/2014/main" id="{BF0F0496-AF85-42EF-8913-27B24BD87F68}"/>
               </a:ext>
             </a:extLst>
           </p:cNvPr>
@@ -8014,7 +7605,7 @@
     </p:spTree>
     <p:extLst>
       <p:ext uri="{BB962C8B-B14F-4D97-AF65-F5344CB8AC3E}">
-        <p14:creationId xmlns:p14="http://schemas.microsoft.com/office/powerpoint/2010/main" val="742818523"/>
+        <p14:creationId xmlns:p14="http://schemas.microsoft.com/office/powerpoint/2010/main" val="698983597"/>
       </p:ext>
     </p:extLst>
   </p:cSld>
@@ -8051,10 +7642,10 @@
       </p:grpSpPr>
       <p:sp>
         <p:nvSpPr>
-          <p:cNvPr id="30" name="Rectangle 29">
-            <a:extLst>
-              <a:ext uri="{FF2B5EF4-FFF2-40B4-BE49-F238E27FC236}">
-                <a16:creationId xmlns:a16="http://schemas.microsoft.com/office/drawing/2014/main" id="{C8DC1E04-32A7-4E36-AA17-B498CC913359}"/>
+          <p:cNvPr id="29" name="Rectangle 28">
+            <a:extLst>
+              <a:ext uri="{FF2B5EF4-FFF2-40B4-BE49-F238E27FC236}">
+                <a16:creationId xmlns:a16="http://schemas.microsoft.com/office/drawing/2014/main" id="{14180D20-DEE4-499E-BEF2-3C52C1505886}"/>
               </a:ext>
             </a:extLst>
           </p:cNvPr>
@@ -8104,7 +7695,7 @@
           <p:cNvPr id="2" name="title">
             <a:extLst>
               <a:ext uri="{FF2B5EF4-FFF2-40B4-BE49-F238E27FC236}">
-                <a16:creationId xmlns:a16="http://schemas.microsoft.com/office/drawing/2014/main" id="{ECB5A6F3-E090-4D15-8788-2601B2B47C13}"/>
+                <a16:creationId xmlns:a16="http://schemas.microsoft.com/office/drawing/2014/main" id="{F7586429-F815-41B1-B0F2-7E254D901B9F}"/>
               </a:ext>
             </a:extLst>
           </p:cNvPr>
@@ -8154,7 +7745,7 @@
           <p:cNvPr id="3" name="Rectangle 2">
             <a:extLst>
               <a:ext uri="{FF2B5EF4-FFF2-40B4-BE49-F238E27FC236}">
-                <a16:creationId xmlns:a16="http://schemas.microsoft.com/office/drawing/2014/main" id="{7F4BF51F-413A-407E-AFBF-A5428BDC4AC8}"/>
+                <a16:creationId xmlns:a16="http://schemas.microsoft.com/office/drawing/2014/main" id="{5A243B2C-B05A-416D-B6A1-1C871B29E0B8}"/>
               </a:ext>
             </a:extLst>
           </p:cNvPr>
@@ -8204,7 +7795,7 @@
           <p:cNvPr id="4" name="Rectangle 3">
             <a:extLst>
               <a:ext uri="{FF2B5EF4-FFF2-40B4-BE49-F238E27FC236}">
-                <a16:creationId xmlns:a16="http://schemas.microsoft.com/office/drawing/2014/main" id="{DFF8C839-9B41-45DB-80BB-9D89E888FE70}"/>
+                <a16:creationId xmlns:a16="http://schemas.microsoft.com/office/drawing/2014/main" id="{BC075D7A-3208-4CFB-ABCF-D141FB5596FF}"/>
               </a:ext>
             </a:extLst>
           </p:cNvPr>
@@ -8242,7 +7833,7 @@
           <p:cNvPr id="5" name="Rectangle 4">
             <a:extLst>
               <a:ext uri="{FF2B5EF4-FFF2-40B4-BE49-F238E27FC236}">
-                <a16:creationId xmlns:a16="http://schemas.microsoft.com/office/drawing/2014/main" id="{504D745C-06C4-460D-9E22-DDD6CFF57AEF}"/>
+                <a16:creationId xmlns:a16="http://schemas.microsoft.com/office/drawing/2014/main" id="{A34B3D22-650B-41AB-B792-1E34852DEC31}"/>
               </a:ext>
             </a:extLst>
           </p:cNvPr>
@@ -8292,7 +7883,7 @@
           <p:cNvPr id="6" name="Rectangle 5">
             <a:extLst>
               <a:ext uri="{FF2B5EF4-FFF2-40B4-BE49-F238E27FC236}">
-                <a16:creationId xmlns:a16="http://schemas.microsoft.com/office/drawing/2014/main" id="{53E7CC96-F6ED-44AD-892A-BA34BD13FBBD}"/>
+                <a16:creationId xmlns:a16="http://schemas.microsoft.com/office/drawing/2014/main" id="{2DC0F712-0C40-438A-AD0F-8F345010979C}"/>
               </a:ext>
             </a:extLst>
           </p:cNvPr>
@@ -8342,7 +7933,7 @@
           <p:cNvPr id="7" name="Rectangle 6">
             <a:extLst>
               <a:ext uri="{FF2B5EF4-FFF2-40B4-BE49-F238E27FC236}">
-                <a16:creationId xmlns:a16="http://schemas.microsoft.com/office/drawing/2014/main" id="{BA0B78E7-79CD-4D4F-AFF7-3B599D37DBE7}"/>
+                <a16:creationId xmlns:a16="http://schemas.microsoft.com/office/drawing/2014/main" id="{40FEC199-319D-42E2-B7BB-7DCD1789D617}"/>
               </a:ext>
             </a:extLst>
           </p:cNvPr>
@@ -8392,7 +7983,7 @@
           <p:cNvPr id="8" name="Rectangle 7">
             <a:extLst>
               <a:ext uri="{FF2B5EF4-FFF2-40B4-BE49-F238E27FC236}">
-                <a16:creationId xmlns:a16="http://schemas.microsoft.com/office/drawing/2014/main" id="{A26739D7-2128-4FFE-A75C-05ABE55734D1}"/>
+                <a16:creationId xmlns:a16="http://schemas.microsoft.com/office/drawing/2014/main" id="{E5A0F9F1-5FE6-4C95-8C3C-247F229E8731}"/>
               </a:ext>
             </a:extLst>
           </p:cNvPr>
@@ -8442,7 +8033,7 @@
           <p:cNvPr id="9" name="Rectangle 8">
             <a:extLst>
               <a:ext uri="{FF2B5EF4-FFF2-40B4-BE49-F238E27FC236}">
-                <a16:creationId xmlns:a16="http://schemas.microsoft.com/office/drawing/2014/main" id="{CBDAB168-96AC-4136-8D36-FE058A19F919}"/>
+                <a16:creationId xmlns:a16="http://schemas.microsoft.com/office/drawing/2014/main" id="{19D0AA7C-72E8-4D22-89FA-25F69849F818}"/>
               </a:ext>
             </a:extLst>
           </p:cNvPr>
@@ -8480,7 +8071,7 @@
           <p:cNvPr id="10" name="Rectangle 9">
             <a:extLst>
               <a:ext uri="{FF2B5EF4-FFF2-40B4-BE49-F238E27FC236}">
-                <a16:creationId xmlns:a16="http://schemas.microsoft.com/office/drawing/2014/main" id="{26476F94-479F-44BD-A43C-B79597F50261}"/>
+                <a16:creationId xmlns:a16="http://schemas.microsoft.com/office/drawing/2014/main" id="{455AEB19-F151-4F1C-A46C-A3232E536314}"/>
               </a:ext>
             </a:extLst>
           </p:cNvPr>
@@ -8530,7 +8121,7 @@
           <p:cNvPr id="11" name="Rectangle 10">
             <a:extLst>
               <a:ext uri="{FF2B5EF4-FFF2-40B4-BE49-F238E27FC236}">
-                <a16:creationId xmlns:a16="http://schemas.microsoft.com/office/drawing/2014/main" id="{518F8C88-E989-460C-9098-1D895C1CAF40}"/>
+                <a16:creationId xmlns:a16="http://schemas.microsoft.com/office/drawing/2014/main" id="{81C9F520-5A8D-499C-9CB8-04961A933369}"/>
               </a:ext>
             </a:extLst>
           </p:cNvPr>
@@ -8580,7 +8171,7 @@
           <p:cNvPr id="12" name="Rectangle 11">
             <a:extLst>
               <a:ext uri="{FF2B5EF4-FFF2-40B4-BE49-F238E27FC236}">
-                <a16:creationId xmlns:a16="http://schemas.microsoft.com/office/drawing/2014/main" id="{9A54B0A7-71E6-472D-A55B-BA2340D8D3BB}"/>
+                <a16:creationId xmlns:a16="http://schemas.microsoft.com/office/drawing/2014/main" id="{537C7CA4-1ECB-41B4-8F2A-0E26E4A55C56}"/>
               </a:ext>
             </a:extLst>
           </p:cNvPr>
@@ -8618,7 +8209,7 @@
           <p:cNvPr id="13" name="Rectangle 12">
             <a:extLst>
               <a:ext uri="{FF2B5EF4-FFF2-40B4-BE49-F238E27FC236}">
-                <a16:creationId xmlns:a16="http://schemas.microsoft.com/office/drawing/2014/main" id="{49CFEA33-A54D-4F0B-9039-F11A7F560040}"/>
+                <a16:creationId xmlns:a16="http://schemas.microsoft.com/office/drawing/2014/main" id="{F1B495BD-EEFB-46E8-AB54-C8510BCEBCC6}"/>
               </a:ext>
             </a:extLst>
           </p:cNvPr>
@@ -8668,7 +8259,7 @@
           <p:cNvPr id="14" name="Rectangle 13">
             <a:extLst>
               <a:ext uri="{FF2B5EF4-FFF2-40B4-BE49-F238E27FC236}">
-                <a16:creationId xmlns:a16="http://schemas.microsoft.com/office/drawing/2014/main" id="{4E1E2CCD-CA7B-4790-92F2-B5C8042F42E1}"/>
+                <a16:creationId xmlns:a16="http://schemas.microsoft.com/office/drawing/2014/main" id="{1590E5C9-6345-49DD-96B6-57C8355BFF3B}"/>
               </a:ext>
             </a:extLst>
           </p:cNvPr>
@@ -8718,7 +8309,7 @@
           <p:cNvPr id="15" name="Rectangle 14">
             <a:extLst>
               <a:ext uri="{FF2B5EF4-FFF2-40B4-BE49-F238E27FC236}">
-                <a16:creationId xmlns:a16="http://schemas.microsoft.com/office/drawing/2014/main" id="{26C55C67-44C0-41E3-BC50-AD5A05EECDDD}"/>
+                <a16:creationId xmlns:a16="http://schemas.microsoft.com/office/drawing/2014/main" id="{2F06B92C-2EEE-40F8-9A37-38959C90135C}"/>
               </a:ext>
             </a:extLst>
           </p:cNvPr>
@@ -8756,7 +8347,7 @@
           <p:cNvPr id="16" name="Rectangle 15">
             <a:extLst>
               <a:ext uri="{FF2B5EF4-FFF2-40B4-BE49-F238E27FC236}">
-                <a16:creationId xmlns:a16="http://schemas.microsoft.com/office/drawing/2014/main" id="{2AAD00C6-9ACD-447D-8318-6D757D7DE562}"/>
+                <a16:creationId xmlns:a16="http://schemas.microsoft.com/office/drawing/2014/main" id="{E9FCA5B5-CDCC-492B-8510-75027E16FB53}"/>
               </a:ext>
             </a:extLst>
           </p:cNvPr>
@@ -8806,7 +8397,7 @@
           <p:cNvPr id="17" name="Rectangle 16">
             <a:extLst>
               <a:ext uri="{FF2B5EF4-FFF2-40B4-BE49-F238E27FC236}">
-                <a16:creationId xmlns:a16="http://schemas.microsoft.com/office/drawing/2014/main" id="{63F2EB1A-DEB3-4F58-8999-67D69065C649}"/>
+                <a16:creationId xmlns:a16="http://schemas.microsoft.com/office/drawing/2014/main" id="{5E6AD7E4-EDB6-497B-A775-F3B93C22A48D}"/>
               </a:ext>
             </a:extLst>
           </p:cNvPr>
@@ -8856,7 +8447,7 @@
           <p:cNvPr id="18" name="Rectangle 17">
             <a:extLst>
               <a:ext uri="{FF2B5EF4-FFF2-40B4-BE49-F238E27FC236}">
-                <a16:creationId xmlns:a16="http://schemas.microsoft.com/office/drawing/2014/main" id="{86D83660-EB7F-4E45-B9CE-6BD4306F2E95}"/>
+                <a16:creationId xmlns:a16="http://schemas.microsoft.com/office/drawing/2014/main" id="{31094511-4FD2-4700-A45B-31ABFC14147E}"/>
               </a:ext>
             </a:extLst>
           </p:cNvPr>
@@ -8894,7 +8485,7 @@
           <p:cNvPr id="19" name="Rectangle 18">
             <a:extLst>
               <a:ext uri="{FF2B5EF4-FFF2-40B4-BE49-F238E27FC236}">
-                <a16:creationId xmlns:a16="http://schemas.microsoft.com/office/drawing/2014/main" id="{D4740E5D-0EF9-466B-82C2-41D084E00A45}"/>
+                <a16:creationId xmlns:a16="http://schemas.microsoft.com/office/drawing/2014/main" id="{E18828CC-DF7D-4C30-8A31-BD82BF18E0C4}"/>
               </a:ext>
             </a:extLst>
           </p:cNvPr>
@@ -8944,7 +8535,7 @@
           <p:cNvPr id="20" name="Rectangle 19">
             <a:extLst>
               <a:ext uri="{FF2B5EF4-FFF2-40B4-BE49-F238E27FC236}">
-                <a16:creationId xmlns:a16="http://schemas.microsoft.com/office/drawing/2014/main" id="{FBC8E02C-4903-44CA-94FB-A7F6CE601E0D}"/>
+                <a16:creationId xmlns:a16="http://schemas.microsoft.com/office/drawing/2014/main" id="{C05EDEC7-11D7-467D-AFB6-A32D812DC972}"/>
               </a:ext>
             </a:extLst>
           </p:cNvPr>
@@ -8982,7 +8573,7 @@
           <p:cNvPr id="21" name="Rectangle 20">
             <a:extLst>
               <a:ext uri="{FF2B5EF4-FFF2-40B4-BE49-F238E27FC236}">
-                <a16:creationId xmlns:a16="http://schemas.microsoft.com/office/drawing/2014/main" id="{503E8778-11BE-4D79-940D-33F769F7F7D9}"/>
+                <a16:creationId xmlns:a16="http://schemas.microsoft.com/office/drawing/2014/main" id="{E0B72781-8721-432C-942E-FF3F07661822}"/>
               </a:ext>
             </a:extLst>
           </p:cNvPr>
@@ -9032,7 +8623,7 @@
           <p:cNvPr id="22" name="Rectangle 21">
             <a:extLst>
               <a:ext uri="{FF2B5EF4-FFF2-40B4-BE49-F238E27FC236}">
-                <a16:creationId xmlns:a16="http://schemas.microsoft.com/office/drawing/2014/main" id="{1CF971D4-C165-44C6-937C-EBFAC6C9448C}"/>
+                <a16:creationId xmlns:a16="http://schemas.microsoft.com/office/drawing/2014/main" id="{3A1F73BA-8216-4FF5-885F-ED7B9BF63402}"/>
               </a:ext>
             </a:extLst>
           </p:cNvPr>
@@ -9082,7 +8673,7 @@
           <p:cNvPr id="23" name="Rectangle 22">
             <a:extLst>
               <a:ext uri="{FF2B5EF4-FFF2-40B4-BE49-F238E27FC236}">
-                <a16:creationId xmlns:a16="http://schemas.microsoft.com/office/drawing/2014/main" id="{AF9B28FF-FC2A-4E4A-9A8C-7B700E76EA1F}"/>
+                <a16:creationId xmlns:a16="http://schemas.microsoft.com/office/drawing/2014/main" id="{59583148-EBD0-43C6-B88E-AE2095D6B478}"/>
               </a:ext>
             </a:extLst>
           </p:cNvPr>
@@ -9120,7 +8711,7 @@
           <p:cNvPr id="24" name="Rectangle 23">
             <a:extLst>
               <a:ext uri="{FF2B5EF4-FFF2-40B4-BE49-F238E27FC236}">
-                <a16:creationId xmlns:a16="http://schemas.microsoft.com/office/drawing/2014/main" id="{8D535024-8ACC-4138-8412-2931A439389A}"/>
+                <a16:creationId xmlns:a16="http://schemas.microsoft.com/office/drawing/2014/main" id="{76F9E3DA-C26A-4896-A7FF-2FF452C799A8}"/>
               </a:ext>
             </a:extLst>
           </p:cNvPr>
@@ -9170,7 +8761,7 @@
           <p:cNvPr id="25" name="Rectangle 24">
             <a:extLst>
               <a:ext uri="{FF2B5EF4-FFF2-40B4-BE49-F238E27FC236}">
-                <a16:creationId xmlns:a16="http://schemas.microsoft.com/office/drawing/2014/main" id="{048C2A48-D7DD-4363-86A6-3AC697598B58}"/>
+                <a16:creationId xmlns:a16="http://schemas.microsoft.com/office/drawing/2014/main" id="{633C3C54-45E0-4615-97EB-18B6B7752C0D}"/>
               </a:ext>
             </a:extLst>
           </p:cNvPr>
@@ -9220,7 +8811,7 @@
           <p:cNvPr id="26" name="Rectangle 25">
             <a:extLst>
               <a:ext uri="{FF2B5EF4-FFF2-40B4-BE49-F238E27FC236}">
-                <a16:creationId xmlns:a16="http://schemas.microsoft.com/office/drawing/2014/main" id="{CB192501-7544-4ACA-A882-D1BCDAB6AD74}"/>
+                <a16:creationId xmlns:a16="http://schemas.microsoft.com/office/drawing/2014/main" id="{98FF115E-DB95-45FD-BDCF-D18A132E0D8A}"/>
               </a:ext>
             </a:extLst>
           </p:cNvPr>
@@ -9270,7 +8861,7 @@
           <p:cNvPr id="27" name="Rectangle 26">
             <a:extLst>
               <a:ext uri="{FF2B5EF4-FFF2-40B4-BE49-F238E27FC236}">
-                <a16:creationId xmlns:a16="http://schemas.microsoft.com/office/drawing/2014/main" id="{77EA3623-57E8-46C1-B71F-39818401A6EA}"/>
+                <a16:creationId xmlns:a16="http://schemas.microsoft.com/office/drawing/2014/main" id="{FB07E7CF-75DF-4F1B-8CB1-74B2780EC2A4}"/>
               </a:ext>
             </a:extLst>
           </p:cNvPr>
@@ -9320,57 +8911,7 @@
           <p:cNvPr id="28" name="Rectangle 27">
             <a:extLst>
               <a:ext uri="{FF2B5EF4-FFF2-40B4-BE49-F238E27FC236}">
-                <a16:creationId xmlns:a16="http://schemas.microsoft.com/office/drawing/2014/main" id="{87287DF2-AC71-4F13-B879-4C2B590209A7}"/>
-              </a:ext>
-            </a:extLst>
-          </p:cNvPr>
-          <p:cNvSpPr>
-            <a:spLocks noGrp="1"/>
-          </p:cNvSpPr>
-          <p:nvPr/>
-        </p:nvSpPr>
-        <p:spPr>
-          <a:xfrm>
-            <a:off x="685800" y="6457950"/>
-            <a:ext cx="3333750" cy="152400"/>
-          </a:xfrm>
-          <a:prstGeom prst="rect">
-            <a:avLst/>
-          </a:prstGeom>
-          <a:noFill/>
-          <a:ln w="0">
-            <a:noFill/>
-            <a:prstDash val="solid"/>
-          </a:ln>
-        </p:spPr>
-        <p:txBody>
-          <a:bodyPr anchor="ctr"/>
-          <a:lstStyle/>
-          <a:p>
-            <a:pPr>
-              <a:defRPr sz="825" b="0">
-                <a:solidFill>
-                  <a:srgbClr val="5D6775"/>
-                </a:solidFill>
-              </a:defRPr>
-            </a:pPr>
-            <a:r>
-              <a:rPr sz="825" b="0">
-                <a:solidFill>
-                  <a:srgbClr val="5D6775"/>
-                </a:solidFill>
-              </a:rPr>
-              <a:t>崇越論文大賞決賽  |  M0263</a:t>
-            </a:r>
-          </a:p>
-        </p:txBody>
-      </p:sp>
-      <p:sp>
-        <p:nvSpPr>
-          <p:cNvPr id="29" name="Rectangle 28">
-            <a:extLst>
-              <a:ext uri="{FF2B5EF4-FFF2-40B4-BE49-F238E27FC236}">
-                <a16:creationId xmlns:a16="http://schemas.microsoft.com/office/drawing/2014/main" id="{5B13C7B8-F8F4-4593-A71D-099966E1EE91}"/>
+                <a16:creationId xmlns:a16="http://schemas.microsoft.com/office/drawing/2014/main" id="{A6860292-EC6E-48DB-A917-D002C71F2B0B}"/>
               </a:ext>
             </a:extLst>
           </p:cNvPr>
@@ -9418,7 +8959,7 @@
     </p:spTree>
     <p:extLst>
       <p:ext uri="{BB962C8B-B14F-4D97-AF65-F5344CB8AC3E}">
-        <p14:creationId xmlns:p14="http://schemas.microsoft.com/office/powerpoint/2010/main" val="12377231"/>
+        <p14:creationId xmlns:p14="http://schemas.microsoft.com/office/powerpoint/2010/main" val="813740498"/>
       </p:ext>
     </p:extLst>
   </p:cSld>
@@ -9455,10 +8996,10 @@
       </p:grpSpPr>
       <p:sp>
         <p:nvSpPr>
-          <p:cNvPr id="25" name="Rectangle 24">
-            <a:extLst>
-              <a:ext uri="{FF2B5EF4-FFF2-40B4-BE49-F238E27FC236}">
-                <a16:creationId xmlns:a16="http://schemas.microsoft.com/office/drawing/2014/main" id="{2F302962-84B0-4D4F-B1A3-245409AB8490}"/>
+          <p:cNvPr id="24" name="Rectangle 23">
+            <a:extLst>
+              <a:ext uri="{FF2B5EF4-FFF2-40B4-BE49-F238E27FC236}">
+                <a16:creationId xmlns:a16="http://schemas.microsoft.com/office/drawing/2014/main" id="{5FAFE860-C434-4975-B110-D5CA09506880}"/>
               </a:ext>
             </a:extLst>
           </p:cNvPr>
@@ -9508,7 +9049,7 @@
           <p:cNvPr id="2" name="title">
             <a:extLst>
               <a:ext uri="{FF2B5EF4-FFF2-40B4-BE49-F238E27FC236}">
-                <a16:creationId xmlns:a16="http://schemas.microsoft.com/office/drawing/2014/main" id="{77C309D2-8F81-49D5-A2D8-B2EF503058A8}"/>
+                <a16:creationId xmlns:a16="http://schemas.microsoft.com/office/drawing/2014/main" id="{5DBF5726-C92C-4B88-9C66-679272D2C649}"/>
               </a:ext>
             </a:extLst>
           </p:cNvPr>
@@ -9558,7 +9099,7 @@
           <p:cNvPr id="3" name="Rectangle 2">
             <a:extLst>
               <a:ext uri="{FF2B5EF4-FFF2-40B4-BE49-F238E27FC236}">
-                <a16:creationId xmlns:a16="http://schemas.microsoft.com/office/drawing/2014/main" id="{85DB4C55-3C75-42D4-9138-236F34F6117C}"/>
+                <a16:creationId xmlns:a16="http://schemas.microsoft.com/office/drawing/2014/main" id="{5D1E72E4-C411-461F-9AED-DF83530F0519}"/>
               </a:ext>
             </a:extLst>
           </p:cNvPr>
@@ -9608,7 +9149,7 @@
           <p:cNvPr id="4" name="Rectangle 3">
             <a:extLst>
               <a:ext uri="{FF2B5EF4-FFF2-40B4-BE49-F238E27FC236}">
-                <a16:creationId xmlns:a16="http://schemas.microsoft.com/office/drawing/2014/main" id="{7F8DFB3B-CD64-4671-8577-14E024884A97}"/>
+                <a16:creationId xmlns:a16="http://schemas.microsoft.com/office/drawing/2014/main" id="{F1EFA69C-0B92-4D45-B979-C6B0ED1BC101}"/>
               </a:ext>
             </a:extLst>
           </p:cNvPr>
@@ -9646,7 +9187,7 @@
           <p:cNvPr id="5" name="Rectangle 4">
             <a:extLst>
               <a:ext uri="{FF2B5EF4-FFF2-40B4-BE49-F238E27FC236}">
-                <a16:creationId xmlns:a16="http://schemas.microsoft.com/office/drawing/2014/main" id="{B92F3D6A-18DC-40A4-81DA-2F0528E0C79A}"/>
+                <a16:creationId xmlns:a16="http://schemas.microsoft.com/office/drawing/2014/main" id="{4DA6ADCD-427F-456E-A9FD-438EF6B4E0E4}"/>
               </a:ext>
             </a:extLst>
           </p:cNvPr>
@@ -9696,7 +9237,7 @@
           <p:cNvPr id="6" name="Rectangle 5">
             <a:extLst>
               <a:ext uri="{FF2B5EF4-FFF2-40B4-BE49-F238E27FC236}">
-                <a16:creationId xmlns:a16="http://schemas.microsoft.com/office/drawing/2014/main" id="{3FC967C9-71A8-46E7-AC85-DC7BAD624B1B}"/>
+                <a16:creationId xmlns:a16="http://schemas.microsoft.com/office/drawing/2014/main" id="{3DA15961-C79D-4E7D-946C-0F7450FDDB40}"/>
               </a:ext>
             </a:extLst>
           </p:cNvPr>
@@ -9734,7 +9275,7 @@
           <p:cNvPr id="7" name="Rectangle 6">
             <a:extLst>
               <a:ext uri="{FF2B5EF4-FFF2-40B4-BE49-F238E27FC236}">
-                <a16:creationId xmlns:a16="http://schemas.microsoft.com/office/drawing/2014/main" id="{EBA735F3-ABA4-4FEB-9B30-4E5C47748089}"/>
+                <a16:creationId xmlns:a16="http://schemas.microsoft.com/office/drawing/2014/main" id="{FEF63ED9-7691-45A1-9E58-10380B2429C9}"/>
               </a:ext>
             </a:extLst>
           </p:cNvPr>
@@ -9784,7 +9325,7 @@
           <p:cNvPr id="8" name="Rectangle 7">
             <a:extLst>
               <a:ext uri="{FF2B5EF4-FFF2-40B4-BE49-F238E27FC236}">
-                <a16:creationId xmlns:a16="http://schemas.microsoft.com/office/drawing/2014/main" id="{855DCF07-C829-4258-8454-A9C8779D3C2A}"/>
+                <a16:creationId xmlns:a16="http://schemas.microsoft.com/office/drawing/2014/main" id="{C15FFBC5-6693-49B5-B05B-A537CEBD0352}"/>
               </a:ext>
             </a:extLst>
           </p:cNvPr>
@@ -9834,7 +9375,7 @@
           <p:cNvPr id="9" name="Rectangle 8">
             <a:extLst>
               <a:ext uri="{FF2B5EF4-FFF2-40B4-BE49-F238E27FC236}">
-                <a16:creationId xmlns:a16="http://schemas.microsoft.com/office/drawing/2014/main" id="{C06241E8-9EE4-41D4-8143-3009F00D5DEE}"/>
+                <a16:creationId xmlns:a16="http://schemas.microsoft.com/office/drawing/2014/main" id="{6C8E9DCE-CF08-4D8B-8D56-B99A251FD259}"/>
               </a:ext>
             </a:extLst>
           </p:cNvPr>
@@ -9901,7 +9442,7 @@
           <p:cNvPr id="10" name="Rectangle 9">
             <a:extLst>
               <a:ext uri="{FF2B5EF4-FFF2-40B4-BE49-F238E27FC236}">
-                <a16:creationId xmlns:a16="http://schemas.microsoft.com/office/drawing/2014/main" id="{7E2D29B8-7636-49E2-9A07-60129D739DC5}"/>
+                <a16:creationId xmlns:a16="http://schemas.microsoft.com/office/drawing/2014/main" id="{7BBAA899-3C95-4081-BD7F-C5F22B5E1212}"/>
               </a:ext>
             </a:extLst>
           </p:cNvPr>
@@ -9939,7 +9480,7 @@
           <p:cNvPr id="11" name="Rectangle 10">
             <a:extLst>
               <a:ext uri="{FF2B5EF4-FFF2-40B4-BE49-F238E27FC236}">
-                <a16:creationId xmlns:a16="http://schemas.microsoft.com/office/drawing/2014/main" id="{C228F64D-6DBD-45B3-8E15-FC7CE5818DC8}"/>
+                <a16:creationId xmlns:a16="http://schemas.microsoft.com/office/drawing/2014/main" id="{0F52A72F-149A-465A-AA87-1223632038AE}"/>
               </a:ext>
             </a:extLst>
           </p:cNvPr>
@@ -9989,7 +9530,7 @@
           <p:cNvPr id="12" name="Rectangle 11">
             <a:extLst>
               <a:ext uri="{FF2B5EF4-FFF2-40B4-BE49-F238E27FC236}">
-                <a16:creationId xmlns:a16="http://schemas.microsoft.com/office/drawing/2014/main" id="{F85F680D-5805-438B-AD55-A8275E8E99A6}"/>
+                <a16:creationId xmlns:a16="http://schemas.microsoft.com/office/drawing/2014/main" id="{89902A2C-E758-4244-BBE7-3E6662BC70DD}"/>
               </a:ext>
             </a:extLst>
           </p:cNvPr>
@@ -10039,7 +9580,7 @@
           <p:cNvPr id="13" name="Rectangle 12">
             <a:extLst>
               <a:ext uri="{FF2B5EF4-FFF2-40B4-BE49-F238E27FC236}">
-                <a16:creationId xmlns:a16="http://schemas.microsoft.com/office/drawing/2014/main" id="{787EE2DB-E826-4C7A-8685-97999DEC3320}"/>
+                <a16:creationId xmlns:a16="http://schemas.microsoft.com/office/drawing/2014/main" id="{CA2D4A34-6B01-404C-A408-641C0FF06679}"/>
               </a:ext>
             </a:extLst>
           </p:cNvPr>
@@ -10106,7 +9647,7 @@
           <p:cNvPr id="14" name="Rectangle 13">
             <a:extLst>
               <a:ext uri="{FF2B5EF4-FFF2-40B4-BE49-F238E27FC236}">
-                <a16:creationId xmlns:a16="http://schemas.microsoft.com/office/drawing/2014/main" id="{EF8FB96C-9619-4C61-8643-0A133FE62338}"/>
+                <a16:creationId xmlns:a16="http://schemas.microsoft.com/office/drawing/2014/main" id="{2BF09369-5D93-42F8-8921-324406B82706}"/>
               </a:ext>
             </a:extLst>
           </p:cNvPr>
@@ -10144,7 +9685,7 @@
           <p:cNvPr id="15" name="Rectangle 14">
             <a:extLst>
               <a:ext uri="{FF2B5EF4-FFF2-40B4-BE49-F238E27FC236}">
-                <a16:creationId xmlns:a16="http://schemas.microsoft.com/office/drawing/2014/main" id="{F54DEB20-F226-4532-9F9E-A095A8937E37}"/>
+                <a16:creationId xmlns:a16="http://schemas.microsoft.com/office/drawing/2014/main" id="{E79DF11F-96C0-4C40-A50A-2933A59AE2F0}"/>
               </a:ext>
             </a:extLst>
           </p:cNvPr>
@@ -10194,7 +9735,7 @@
           <p:cNvPr id="16" name="Rectangle 15">
             <a:extLst>
               <a:ext uri="{FF2B5EF4-FFF2-40B4-BE49-F238E27FC236}">
-                <a16:creationId xmlns:a16="http://schemas.microsoft.com/office/drawing/2014/main" id="{27396478-080E-4385-9433-32E113D66B9E}"/>
+                <a16:creationId xmlns:a16="http://schemas.microsoft.com/office/drawing/2014/main" id="{5E09000C-6F41-474B-B086-C8FF29F8FC75}"/>
               </a:ext>
             </a:extLst>
           </p:cNvPr>
@@ -10244,7 +9785,7 @@
           <p:cNvPr id="17" name="Rectangle 16">
             <a:extLst>
               <a:ext uri="{FF2B5EF4-FFF2-40B4-BE49-F238E27FC236}">
-                <a16:creationId xmlns:a16="http://schemas.microsoft.com/office/drawing/2014/main" id="{0D3189DA-9D45-45CD-96A3-B6CAF2331BBC}"/>
+                <a16:creationId xmlns:a16="http://schemas.microsoft.com/office/drawing/2014/main" id="{A13DD585-7E2C-47A5-A946-C4AA9B5BF448}"/>
               </a:ext>
             </a:extLst>
           </p:cNvPr>
@@ -10311,7 +9852,7 @@
           <p:cNvPr id="18" name="Rectangle 17">
             <a:extLst>
               <a:ext uri="{FF2B5EF4-FFF2-40B4-BE49-F238E27FC236}">
-                <a16:creationId xmlns:a16="http://schemas.microsoft.com/office/drawing/2014/main" id="{5E9080D5-D412-438B-B25E-9E38F2DA2541}"/>
+                <a16:creationId xmlns:a16="http://schemas.microsoft.com/office/drawing/2014/main" id="{0AF3F0AA-0988-4E5C-A0F7-5624966E12CC}"/>
               </a:ext>
             </a:extLst>
           </p:cNvPr>
@@ -10349,7 +9890,7 @@
           <p:cNvPr id="19" name="Rectangle 18">
             <a:extLst>
               <a:ext uri="{FF2B5EF4-FFF2-40B4-BE49-F238E27FC236}">
-                <a16:creationId xmlns:a16="http://schemas.microsoft.com/office/drawing/2014/main" id="{CF0783EA-3CF9-462A-80CD-47E2DE48D343}"/>
+                <a16:creationId xmlns:a16="http://schemas.microsoft.com/office/drawing/2014/main" id="{D2BCC21F-68D4-465D-A763-D7813BC6D7A4}"/>
               </a:ext>
             </a:extLst>
           </p:cNvPr>
@@ -10399,7 +9940,7 @@
           <p:cNvPr id="20" name="Rectangle 19">
             <a:extLst>
               <a:ext uri="{FF2B5EF4-FFF2-40B4-BE49-F238E27FC236}">
-                <a16:creationId xmlns:a16="http://schemas.microsoft.com/office/drawing/2014/main" id="{7AC7A55E-367B-4A1B-8D3F-9F153D95ED3C}"/>
+                <a16:creationId xmlns:a16="http://schemas.microsoft.com/office/drawing/2014/main" id="{1008FA73-A918-4A11-8474-450FCEDB2E0B}"/>
               </a:ext>
             </a:extLst>
           </p:cNvPr>
@@ -10449,7 +9990,7 @@
           <p:cNvPr id="21" name="Rectangle 20">
             <a:extLst>
               <a:ext uri="{FF2B5EF4-FFF2-40B4-BE49-F238E27FC236}">
-                <a16:creationId xmlns:a16="http://schemas.microsoft.com/office/drawing/2014/main" id="{7F7CEE61-180B-45EF-94B3-3485890B4B54}"/>
+                <a16:creationId xmlns:a16="http://schemas.microsoft.com/office/drawing/2014/main" id="{A1609FE5-5574-4456-A0C3-A648BC6E8111}"/>
               </a:ext>
             </a:extLst>
           </p:cNvPr>
@@ -10533,7 +10074,7 @@
           <p:cNvPr id="22" name="Rectangle 21">
             <a:extLst>
               <a:ext uri="{FF2B5EF4-FFF2-40B4-BE49-F238E27FC236}">
-                <a16:creationId xmlns:a16="http://schemas.microsoft.com/office/drawing/2014/main" id="{54A1B0DF-D97F-4051-A206-388FDCDA98A8}"/>
+                <a16:creationId xmlns:a16="http://schemas.microsoft.com/office/drawing/2014/main" id="{3FE870DB-DD6D-4432-8818-49A9F574C191}"/>
               </a:ext>
             </a:extLst>
           </p:cNvPr>
@@ -10583,57 +10124,7 @@
           <p:cNvPr id="23" name="Rectangle 22">
             <a:extLst>
               <a:ext uri="{FF2B5EF4-FFF2-40B4-BE49-F238E27FC236}">
-                <a16:creationId xmlns:a16="http://schemas.microsoft.com/office/drawing/2014/main" id="{92289934-39EB-4326-9C6A-B56F887DC1FC}"/>
-              </a:ext>
-            </a:extLst>
-          </p:cNvPr>
-          <p:cNvSpPr>
-            <a:spLocks noGrp="1"/>
-          </p:cNvSpPr>
-          <p:nvPr/>
-        </p:nvSpPr>
-        <p:spPr>
-          <a:xfrm>
-            <a:off x="685800" y="6457950"/>
-            <a:ext cx="3333750" cy="152400"/>
-          </a:xfrm>
-          <a:prstGeom prst="rect">
-            <a:avLst/>
-          </a:prstGeom>
-          <a:noFill/>
-          <a:ln w="0">
-            <a:noFill/>
-            <a:prstDash val="solid"/>
-          </a:ln>
-        </p:spPr>
-        <p:txBody>
-          <a:bodyPr anchor="ctr"/>
-          <a:lstStyle/>
-          <a:p>
-            <a:pPr>
-              <a:defRPr sz="825" b="0">
-                <a:solidFill>
-                  <a:srgbClr val="5D6775"/>
-                </a:solidFill>
-              </a:defRPr>
-            </a:pPr>
-            <a:r>
-              <a:rPr sz="825" b="0">
-                <a:solidFill>
-                  <a:srgbClr val="5D6775"/>
-                </a:solidFill>
-              </a:rPr>
-              <a:t>崇越論文大賞決賽  |  M0263</a:t>
-            </a:r>
-          </a:p>
-        </p:txBody>
-      </p:sp>
-      <p:sp>
-        <p:nvSpPr>
-          <p:cNvPr id="24" name="Rectangle 23">
-            <a:extLst>
-              <a:ext uri="{FF2B5EF4-FFF2-40B4-BE49-F238E27FC236}">
-                <a16:creationId xmlns:a16="http://schemas.microsoft.com/office/drawing/2014/main" id="{4D4EFC30-BD5C-4A64-890F-6CC09AAF16C2}"/>
+                <a16:creationId xmlns:a16="http://schemas.microsoft.com/office/drawing/2014/main" id="{B168DCC4-4078-45F9-93D2-0CC9DDD4A44B}"/>
               </a:ext>
             </a:extLst>
           </p:cNvPr>
@@ -10681,7 +10172,7 @@
     </p:spTree>
     <p:extLst>
       <p:ext uri="{BB962C8B-B14F-4D97-AF65-F5344CB8AC3E}">
-        <p14:creationId xmlns:p14="http://schemas.microsoft.com/office/powerpoint/2010/main" val="1814881920"/>
+        <p14:creationId xmlns:p14="http://schemas.microsoft.com/office/powerpoint/2010/main" val="1829391079"/>
       </p:ext>
     </p:extLst>
   </p:cSld>
@@ -10718,10 +10209,10 @@
       </p:grpSpPr>
       <p:sp>
         <p:nvSpPr>
-          <p:cNvPr id="19" name="Rectangle 18">
-            <a:extLst>
-              <a:ext uri="{FF2B5EF4-FFF2-40B4-BE49-F238E27FC236}">
-                <a16:creationId xmlns:a16="http://schemas.microsoft.com/office/drawing/2014/main" id="{4B9ECF76-C0FE-4C47-8814-DDA3A594E138}"/>
+          <p:cNvPr id="18" name="Rectangle 17">
+            <a:extLst>
+              <a:ext uri="{FF2B5EF4-FFF2-40B4-BE49-F238E27FC236}">
+                <a16:creationId xmlns:a16="http://schemas.microsoft.com/office/drawing/2014/main" id="{9ABA113D-DB05-4FBD-9F68-BEBD3BD0F9A2}"/>
               </a:ext>
             </a:extLst>
           </p:cNvPr>
@@ -10771,7 +10262,7 @@
           <p:cNvPr id="2" name="Rectangle 1">
             <a:extLst>
               <a:ext uri="{FF2B5EF4-FFF2-40B4-BE49-F238E27FC236}">
-                <a16:creationId xmlns:a16="http://schemas.microsoft.com/office/drawing/2014/main" id="{DFF28E85-5EA5-4A3B-95A3-5C011B3D7974}"/>
+                <a16:creationId xmlns:a16="http://schemas.microsoft.com/office/drawing/2014/main" id="{9FE4BD30-3560-4344-82E9-C441E4D5A1D1}"/>
               </a:ext>
             </a:extLst>
           </p:cNvPr>
@@ -10806,30 +10297,18 @@
               </a:defRPr>
             </a:pPr>
             <a:r>
-              <a:rPr sz="4350" b="1">
-                <a:solidFill>
-                  <a:srgbClr val="111827"/>
-                </a:solidFill>
-              </a:rPr>
-              <a:t>判決文本</a:t>
-            </a:r>
-          </a:p>
-          <a:p>
-            <a:pPr>
-              <a:defRPr sz="4350" b="1">
-                <a:solidFill>
-                  <a:srgbClr val="111827"/>
-                </a:solidFill>
-              </a:defRPr>
-            </a:pPr>
-            <a:r>
-              <a:rPr sz="4350" b="1">
-                <a:solidFill>
-                  <a:srgbClr val="111827"/>
-                </a:solidFill>
-              </a:rPr>
-              <a:t>確實會說話。</a:t>
-            </a:r>
+              <a:rPr sz="4350" b="1" dirty="0" err="1">
+                <a:solidFill>
+                  <a:srgbClr val="111827"/>
+                </a:solidFill>
+              </a:rPr>
+              <a:t>判決文本確實會說話</a:t>
+            </a:r>
+            <a:endParaRPr sz="4350" b="1" dirty="0">
+              <a:solidFill>
+                <a:srgbClr val="111827"/>
+              </a:solidFill>
+            </a:endParaRPr>
           </a:p>
         </p:txBody>
       </p:sp>
@@ -10838,7 +10317,7 @@
           <p:cNvPr id="3" name="Rectangle 2">
             <a:extLst>
               <a:ext uri="{FF2B5EF4-FFF2-40B4-BE49-F238E27FC236}">
-                <a16:creationId xmlns:a16="http://schemas.microsoft.com/office/drawing/2014/main" id="{3414F6EB-5343-4689-B7D5-25097D85C47B}"/>
+                <a16:creationId xmlns:a16="http://schemas.microsoft.com/office/drawing/2014/main" id="{DB76B5E5-6132-4436-889F-54B2CDE9E6AC}"/>
               </a:ext>
             </a:extLst>
           </p:cNvPr>
@@ -10888,7 +10367,7 @@
           <p:cNvPr id="4" name="Rectangle 3">
             <a:extLst>
               <a:ext uri="{FF2B5EF4-FFF2-40B4-BE49-F238E27FC236}">
-                <a16:creationId xmlns:a16="http://schemas.microsoft.com/office/drawing/2014/main" id="{F233EA9B-C0DE-48C4-AB98-8510C094ABB8}"/>
+                <a16:creationId xmlns:a16="http://schemas.microsoft.com/office/drawing/2014/main" id="{9292B825-21B7-4864-93C0-14E59F7B5513}"/>
               </a:ext>
             </a:extLst>
           </p:cNvPr>
@@ -10926,7 +10405,7 @@
           <p:cNvPr id="5" name="Rectangle 4">
             <a:extLst>
               <a:ext uri="{FF2B5EF4-FFF2-40B4-BE49-F238E27FC236}">
-                <a16:creationId xmlns:a16="http://schemas.microsoft.com/office/drawing/2014/main" id="{C3311B46-CC91-44E2-8EC7-57B9262A389E}"/>
+                <a16:creationId xmlns:a16="http://schemas.microsoft.com/office/drawing/2014/main" id="{EE440962-2DE5-4A8E-93D7-3CD7A5419642}"/>
               </a:ext>
             </a:extLst>
           </p:cNvPr>
@@ -10976,7 +10455,7 @@
           <p:cNvPr id="6" name="Rectangle 5">
             <a:extLst>
               <a:ext uri="{FF2B5EF4-FFF2-40B4-BE49-F238E27FC236}">
-                <a16:creationId xmlns:a16="http://schemas.microsoft.com/office/drawing/2014/main" id="{E5A62273-2EBF-4F48-9A6D-6C47747095CF}"/>
+                <a16:creationId xmlns:a16="http://schemas.microsoft.com/office/drawing/2014/main" id="{8896D39F-8B36-4F03-BC83-F5F8F30B6FEC}"/>
               </a:ext>
             </a:extLst>
           </p:cNvPr>
@@ -11026,7 +10505,7 @@
           <p:cNvPr id="7" name="Rectangle 6">
             <a:extLst>
               <a:ext uri="{FF2B5EF4-FFF2-40B4-BE49-F238E27FC236}">
-                <a16:creationId xmlns:a16="http://schemas.microsoft.com/office/drawing/2014/main" id="{D8D4486F-9350-4FF9-868C-1592C8FA59FC}"/>
+                <a16:creationId xmlns:a16="http://schemas.microsoft.com/office/drawing/2014/main" id="{5C85DC3E-192E-4CEC-ACA3-765219FD4BAC}"/>
               </a:ext>
             </a:extLst>
           </p:cNvPr>
@@ -11076,7 +10555,7 @@
           <p:cNvPr id="8" name="Rectangle 7">
             <a:extLst>
               <a:ext uri="{FF2B5EF4-FFF2-40B4-BE49-F238E27FC236}">
-                <a16:creationId xmlns:a16="http://schemas.microsoft.com/office/drawing/2014/main" id="{E6C887D3-2A26-431B-A748-3B3FD02F7172}"/>
+                <a16:creationId xmlns:a16="http://schemas.microsoft.com/office/drawing/2014/main" id="{55ACF4DA-EEBD-4CF8-9746-985448CBDADA}"/>
               </a:ext>
             </a:extLst>
           </p:cNvPr>
@@ -11126,19 +10605,19 @@
           <p:cNvPr id="9" name="Rectangle 8">
             <a:extLst>
               <a:ext uri="{FF2B5EF4-FFF2-40B4-BE49-F238E27FC236}">
-                <a16:creationId xmlns:a16="http://schemas.microsoft.com/office/drawing/2014/main" id="{92EFC7F0-F278-431A-A197-A7350963955D}"/>
-              </a:ext>
-            </a:extLst>
-          </p:cNvPr>
-          <p:cNvSpPr>
-            <a:spLocks noGrp="1"/>
-          </p:cNvSpPr>
-          <p:nvPr/>
-        </p:nvSpPr>
-        <p:spPr>
-          <a:xfrm>
-            <a:off x="685800" y="5200650"/>
-            <a:ext cx="2057400" cy="266700"/>
+                <a16:creationId xmlns:a16="http://schemas.microsoft.com/office/drawing/2014/main" id="{478DDD1C-2909-4C15-94F8-655140437969}"/>
+              </a:ext>
+            </a:extLst>
+          </p:cNvPr>
+          <p:cNvSpPr>
+            <a:spLocks noGrp="1"/>
+          </p:cNvSpPr>
+          <p:nvPr/>
+        </p:nvSpPr>
+        <p:spPr>
+          <a:xfrm>
+            <a:off x="685799" y="5200650"/>
+            <a:ext cx="1929809" cy="266700"/>
           </a:xfrm>
           <a:prstGeom prst="rect">
             <a:avLst/>
@@ -11181,7 +10660,7 @@
           <p:cNvPr id="10" name="Rectangle 9">
             <a:extLst>
               <a:ext uri="{FF2B5EF4-FFF2-40B4-BE49-F238E27FC236}">
-                <a16:creationId xmlns:a16="http://schemas.microsoft.com/office/drawing/2014/main" id="{7A9FDD44-2582-494F-92D2-DF9AA74431DF}"/>
+                <a16:creationId xmlns:a16="http://schemas.microsoft.com/office/drawing/2014/main" id="{8018CB1C-BA86-4CEC-BE6B-E33482877F2C}"/>
               </a:ext>
             </a:extLst>
           </p:cNvPr>
@@ -11231,7 +10710,7 @@
           <p:cNvPr id="11" name="Rectangle 10">
             <a:extLst>
               <a:ext uri="{FF2B5EF4-FFF2-40B4-BE49-F238E27FC236}">
-                <a16:creationId xmlns:a16="http://schemas.microsoft.com/office/drawing/2014/main" id="{C40E4D6A-15FE-4A1A-88CC-8FC10705E72F}"/>
+                <a16:creationId xmlns:a16="http://schemas.microsoft.com/office/drawing/2014/main" id="{6A6A70A7-107F-4D6F-87C3-A4CB6E976688}"/>
               </a:ext>
             </a:extLst>
           </p:cNvPr>
@@ -11269,7 +10748,7 @@
           <p:cNvPr id="12" name="Rectangle 11">
             <a:extLst>
               <a:ext uri="{FF2B5EF4-FFF2-40B4-BE49-F238E27FC236}">
-                <a16:creationId xmlns:a16="http://schemas.microsoft.com/office/drawing/2014/main" id="{923EF3D8-5492-49D2-A369-266EABD040E1}"/>
+                <a16:creationId xmlns:a16="http://schemas.microsoft.com/office/drawing/2014/main" id="{82118B03-007E-47F6-8672-52B81A54E460}"/>
               </a:ext>
             </a:extLst>
           </p:cNvPr>
@@ -11319,7 +10798,7 @@
           <p:cNvPr id="13" name="Rectangle 12">
             <a:extLst>
               <a:ext uri="{FF2B5EF4-FFF2-40B4-BE49-F238E27FC236}">
-                <a16:creationId xmlns:a16="http://schemas.microsoft.com/office/drawing/2014/main" id="{C41E3DAB-9D09-4F48-9B43-CC5DEFC85842}"/>
+                <a16:creationId xmlns:a16="http://schemas.microsoft.com/office/drawing/2014/main" id="{A94218EF-2B1F-4D89-B62F-B5D5EEA9F60E}"/>
               </a:ext>
             </a:extLst>
           </p:cNvPr>
@@ -11331,7 +10810,7 @@
         <p:spPr>
           <a:xfrm>
             <a:off x="7829550" y="2038350"/>
-            <a:ext cx="2590800" cy="1562100"/>
+            <a:ext cx="2718392" cy="1562100"/>
           </a:xfrm>
           <a:prstGeom prst="rect">
             <a:avLst/>
@@ -11374,7 +10853,7 @@
           <p:cNvPr id="14" name="Rectangle 13">
             <a:extLst>
               <a:ext uri="{FF2B5EF4-FFF2-40B4-BE49-F238E27FC236}">
-                <a16:creationId xmlns:a16="http://schemas.microsoft.com/office/drawing/2014/main" id="{24751CB3-A558-41FE-83C6-F86402341CC7}"/>
+                <a16:creationId xmlns:a16="http://schemas.microsoft.com/office/drawing/2014/main" id="{3B66E57C-A6C5-4408-9415-145ACD0BDF42}"/>
               </a:ext>
             </a:extLst>
           </p:cNvPr>
@@ -11412,7 +10891,7 @@
           <p:cNvPr id="15" name="Rectangle 14">
             <a:extLst>
               <a:ext uri="{FF2B5EF4-FFF2-40B4-BE49-F238E27FC236}">
-                <a16:creationId xmlns:a16="http://schemas.microsoft.com/office/drawing/2014/main" id="{27EB5712-0DEE-4DAF-8DDA-FED67788534D}"/>
+                <a16:creationId xmlns:a16="http://schemas.microsoft.com/office/drawing/2014/main" id="{EC561B4D-9E55-42CA-B636-03A921415D48}"/>
               </a:ext>
             </a:extLst>
           </p:cNvPr>
@@ -11424,7 +10903,7 @@
         <p:spPr>
           <a:xfrm>
             <a:off x="7829549" y="4210050"/>
-            <a:ext cx="2590799" cy="685800"/>
+            <a:ext cx="2718391" cy="685800"/>
           </a:xfrm>
           <a:prstGeom prst="rect">
             <a:avLst/>
@@ -11470,7 +10949,7 @@
           <p:cNvPr id="16" name="Rectangle 15">
             <a:extLst>
               <a:ext uri="{FF2B5EF4-FFF2-40B4-BE49-F238E27FC236}">
-                <a16:creationId xmlns:a16="http://schemas.microsoft.com/office/drawing/2014/main" id="{712B5614-CB8E-4C29-AAE0-8148AE4C6387}"/>
+                <a16:creationId xmlns:a16="http://schemas.microsoft.com/office/drawing/2014/main" id="{A2B2F01A-C393-4852-84A6-5679FB309D2D}"/>
               </a:ext>
             </a:extLst>
           </p:cNvPr>
@@ -11520,57 +10999,7 @@
           <p:cNvPr id="17" name="Rectangle 16">
             <a:extLst>
               <a:ext uri="{FF2B5EF4-FFF2-40B4-BE49-F238E27FC236}">
-                <a16:creationId xmlns:a16="http://schemas.microsoft.com/office/drawing/2014/main" id="{A62D02DF-E5BC-462E-86B6-252F6D9D4C68}"/>
-              </a:ext>
-            </a:extLst>
-          </p:cNvPr>
-          <p:cNvSpPr>
-            <a:spLocks noGrp="1"/>
-          </p:cNvSpPr>
-          <p:nvPr/>
-        </p:nvSpPr>
-        <p:spPr>
-          <a:xfrm>
-            <a:off x="685800" y="6457950"/>
-            <a:ext cx="3333750" cy="152400"/>
-          </a:xfrm>
-          <a:prstGeom prst="rect">
-            <a:avLst/>
-          </a:prstGeom>
-          <a:noFill/>
-          <a:ln w="0">
-            <a:noFill/>
-            <a:prstDash val="solid"/>
-          </a:ln>
-        </p:spPr>
-        <p:txBody>
-          <a:bodyPr anchor="ctr"/>
-          <a:lstStyle/>
-          <a:p>
-            <a:pPr>
-              <a:defRPr sz="825" b="0">
-                <a:solidFill>
-                  <a:srgbClr val="5D6775"/>
-                </a:solidFill>
-              </a:defRPr>
-            </a:pPr>
-            <a:r>
-              <a:rPr sz="825" b="0">
-                <a:solidFill>
-                  <a:srgbClr val="5D6775"/>
-                </a:solidFill>
-              </a:rPr>
-              <a:t>崇越論文大賞決賽  |  M0263</a:t>
-            </a:r>
-          </a:p>
-        </p:txBody>
-      </p:sp>
-      <p:sp>
-        <p:nvSpPr>
-          <p:cNvPr id="18" name="Rectangle 17">
-            <a:extLst>
-              <a:ext uri="{FF2B5EF4-FFF2-40B4-BE49-F238E27FC236}">
-                <a16:creationId xmlns:a16="http://schemas.microsoft.com/office/drawing/2014/main" id="{EA369F4B-BB74-4036-B06D-E5D0D7F42EBF}"/>
+                <a16:creationId xmlns:a16="http://schemas.microsoft.com/office/drawing/2014/main" id="{45C59BEA-C68F-4AFB-9653-2166AF7CAE41}"/>
               </a:ext>
             </a:extLst>
           </p:cNvPr>
@@ -11618,7 +11047,7 @@
     </p:spTree>
     <p:extLst>
       <p:ext uri="{BB962C8B-B14F-4D97-AF65-F5344CB8AC3E}">
-        <p14:creationId xmlns:p14="http://schemas.microsoft.com/office/powerpoint/2010/main" val="1280281153"/>
+        <p14:creationId xmlns:p14="http://schemas.microsoft.com/office/powerpoint/2010/main" val="1532721676"/>
       </p:ext>
     </p:extLst>
   </p:cSld>
